--- a/material/[SeSAC_YDP_6] 09_Javascript_고급.pptx
+++ b/material/[SeSAC_YDP_6] 09_Javascript_고급.pptx
@@ -5,7 +5,7 @@
     <p:sldMasterId id="2147483698" r:id="rId1"/>
   </p:sldMasterIdLst>
   <p:notesMasterIdLst>
-    <p:notesMasterId r:id="rId27"/>
+    <p:notesMasterId r:id="rId26"/>
   </p:notesMasterIdLst>
   <p:sldIdLst>
     <p:sldId id="355" r:id="rId2"/>
@@ -22,17 +22,16 @@
     <p:sldId id="269" r:id="rId13"/>
     <p:sldId id="270" r:id="rId14"/>
     <p:sldId id="271" r:id="rId15"/>
-    <p:sldId id="488" r:id="rId16"/>
-    <p:sldId id="483" r:id="rId17"/>
-    <p:sldId id="484" r:id="rId18"/>
+    <p:sldId id="483" r:id="rId16"/>
+    <p:sldId id="484" r:id="rId17"/>
+    <p:sldId id="381" r:id="rId18"/>
     <p:sldId id="487" r:id="rId19"/>
     <p:sldId id="258" r:id="rId20"/>
     <p:sldId id="275" r:id="rId21"/>
     <p:sldId id="260" r:id="rId22"/>
     <p:sldId id="261" r:id="rId23"/>
-    <p:sldId id="489" r:id="rId24"/>
-    <p:sldId id="490" r:id="rId25"/>
-    <p:sldId id="491" r:id="rId26"/>
+    <p:sldId id="492" r:id="rId24"/>
+    <p:sldId id="494" r:id="rId25"/>
   </p:sldIdLst>
   <p:sldSz cx="12192000" cy="6858000"/>
   <p:notesSz cx="6858000" cy="9144000"/>
@@ -221,7 +220,7 @@
           <a:p>
             <a:fld id="{26909D1F-AA98-4591-BD37-B93AF1B23D35}" type="datetimeFigureOut">
               <a:rPr lang="ko-KR" altLang="en-US" smtClean="0"/>
-              <a:t>2024-06-04</a:t>
+              <a:t>2024-06-05</a:t>
             </a:fld>
             <a:endParaRPr lang="ko-KR" altLang="en-US"/>
           </a:p>
@@ -572,6 +571,376 @@
 </p:notes>
 </file>
 
+<file path=ppt/notesSlides/notesSlide10.xml><?xml version="1.0" encoding="utf-8"?>
+<p:notes xmlns:a="http://schemas.openxmlformats.org/drawingml/2006/main" xmlns:r="http://schemas.openxmlformats.org/officeDocument/2006/relationships" xmlns:p="http://schemas.openxmlformats.org/presentationml/2006/main">
+  <p:cSld>
+    <p:spTree>
+      <p:nvGrpSpPr>
+        <p:cNvPr id="1" name=""/>
+        <p:cNvGrpSpPr/>
+        <p:nvPr/>
+      </p:nvGrpSpPr>
+      <p:grpSpPr>
+        <a:xfrm>
+          <a:off x="0" y="0"/>
+          <a:ext cx="0" cy="0"/>
+          <a:chOff x="0" y="0"/>
+          <a:chExt cx="0" cy="0"/>
+        </a:xfrm>
+      </p:grpSpPr>
+      <p:sp>
+        <p:nvSpPr>
+          <p:cNvPr id="2" name="슬라이드 이미지 개체 틀 1"/>
+          <p:cNvSpPr>
+            <a:spLocks noGrp="1" noRot="1" noChangeAspect="1"/>
+          </p:cNvSpPr>
+          <p:nvPr>
+            <p:ph type="sldImg"/>
+          </p:nvPr>
+        </p:nvSpPr>
+        <p:spPr/>
+      </p:sp>
+      <p:sp>
+        <p:nvSpPr>
+          <p:cNvPr id="3" name="슬라이드 노트 개체 틀 2"/>
+          <p:cNvSpPr>
+            <a:spLocks noGrp="1"/>
+          </p:cNvSpPr>
+          <p:nvPr>
+            <p:ph type="body" idx="1"/>
+          </p:nvPr>
+        </p:nvSpPr>
+        <p:spPr/>
+        <p:txBody>
+          <a:bodyPr/>
+          <a:lstStyle/>
+          <a:p>
+            <a:r>
+              <a:rPr lang="en-US" altLang="ko-KR" dirty="0" err="1"/>
+              <a:t>constructi</a:t>
+            </a:r>
+            <a:endParaRPr lang="ko-KR" altLang="en-US" dirty="0"/>
+          </a:p>
+        </p:txBody>
+      </p:sp>
+      <p:sp>
+        <p:nvSpPr>
+          <p:cNvPr id="4" name="슬라이드 번호 개체 틀 3"/>
+          <p:cNvSpPr>
+            <a:spLocks noGrp="1"/>
+          </p:cNvSpPr>
+          <p:nvPr>
+            <p:ph type="sldNum" sz="quarter" idx="10"/>
+          </p:nvPr>
+        </p:nvSpPr>
+        <p:spPr/>
+        <p:txBody>
+          <a:bodyPr/>
+          <a:lstStyle/>
+          <a:p>
+            <a:fld id="{6305A4A6-1964-497D-80B2-C6696AAF8B47}" type="slidenum">
+              <a:rPr lang="ko-KR" altLang="en-US" smtClean="0"/>
+              <a:t>19</a:t>
+            </a:fld>
+            <a:endParaRPr lang="ko-KR" altLang="en-US"/>
+          </a:p>
+        </p:txBody>
+      </p:sp>
+    </p:spTree>
+    <p:extLst>
+      <p:ext uri="{BB962C8B-B14F-4D97-AF65-F5344CB8AC3E}">
+        <p14:creationId xmlns:p14="http://schemas.microsoft.com/office/powerpoint/2010/main" val="88659438"/>
+      </p:ext>
+    </p:extLst>
+  </p:cSld>
+  <p:clrMapOvr>
+    <a:masterClrMapping/>
+  </p:clrMapOvr>
+</p:notes>
+</file>
+
+<file path=ppt/notesSlides/notesSlide11.xml><?xml version="1.0" encoding="utf-8"?>
+<p:notes xmlns:a="http://schemas.openxmlformats.org/drawingml/2006/main" xmlns:r="http://schemas.openxmlformats.org/officeDocument/2006/relationships" xmlns:p="http://schemas.openxmlformats.org/presentationml/2006/main">
+  <p:cSld>
+    <p:spTree>
+      <p:nvGrpSpPr>
+        <p:cNvPr id="1" name=""/>
+        <p:cNvGrpSpPr/>
+        <p:nvPr/>
+      </p:nvGrpSpPr>
+      <p:grpSpPr>
+        <a:xfrm>
+          <a:off x="0" y="0"/>
+          <a:ext cx="0" cy="0"/>
+          <a:chOff x="0" y="0"/>
+          <a:chExt cx="0" cy="0"/>
+        </a:xfrm>
+      </p:grpSpPr>
+      <p:sp>
+        <p:nvSpPr>
+          <p:cNvPr id="2" name="슬라이드 이미지 개체 틀 1"/>
+          <p:cNvSpPr>
+            <a:spLocks noGrp="1" noRot="1" noChangeAspect="1"/>
+          </p:cNvSpPr>
+          <p:nvPr>
+            <p:ph type="sldImg"/>
+          </p:nvPr>
+        </p:nvSpPr>
+        <p:spPr/>
+      </p:sp>
+      <p:sp>
+        <p:nvSpPr>
+          <p:cNvPr id="3" name="슬라이드 노트 개체 틀 2"/>
+          <p:cNvSpPr>
+            <a:spLocks noGrp="1"/>
+          </p:cNvSpPr>
+          <p:nvPr>
+            <p:ph type="body" idx="1"/>
+          </p:nvPr>
+        </p:nvSpPr>
+        <p:spPr/>
+        <p:txBody>
+          <a:bodyPr/>
+          <a:lstStyle/>
+          <a:p>
+            <a:r>
+              <a:rPr lang="ko-KR" altLang="en-US" dirty="0"/>
+              <a:t>상속부터는 사실 몰라도 되지 않을까</a:t>
+            </a:r>
+            <a:r>
+              <a:rPr lang="en-US" altLang="ko-KR" dirty="0"/>
+              <a:t>?</a:t>
+            </a:r>
+          </a:p>
+          <a:p>
+            <a:r>
+              <a:rPr lang="en-US" altLang="ko-KR" dirty="0"/>
+              <a:t>super</a:t>
+            </a:r>
+            <a:r>
+              <a:rPr lang="en-US" altLang="ko-KR" baseline="0" dirty="0"/>
+              <a:t> </a:t>
+            </a:r>
+            <a:r>
+              <a:rPr lang="ko-KR" altLang="en-US" baseline="0" dirty="0"/>
+              <a:t>와 </a:t>
+            </a:r>
+            <a:r>
+              <a:rPr lang="en-US" altLang="ko-KR" baseline="0" dirty="0"/>
+              <a:t>overriding</a:t>
+            </a:r>
+            <a:r>
+              <a:rPr lang="ko-KR" altLang="en-US" baseline="0" dirty="0"/>
+              <a:t>은 코드에서 설명</a:t>
+            </a:r>
+            <a:endParaRPr lang="ko-KR" altLang="en-US" dirty="0"/>
+          </a:p>
+        </p:txBody>
+      </p:sp>
+      <p:sp>
+        <p:nvSpPr>
+          <p:cNvPr id="4" name="슬라이드 번호 개체 틀 3"/>
+          <p:cNvSpPr>
+            <a:spLocks noGrp="1"/>
+          </p:cNvSpPr>
+          <p:nvPr>
+            <p:ph type="sldNum" sz="quarter" idx="10"/>
+          </p:nvPr>
+        </p:nvSpPr>
+        <p:spPr/>
+        <p:txBody>
+          <a:bodyPr/>
+          <a:lstStyle/>
+          <a:p>
+            <a:fld id="{6305A4A6-1964-497D-80B2-C6696AAF8B47}" type="slidenum">
+              <a:rPr lang="ko-KR" altLang="en-US" smtClean="0"/>
+              <a:t>22</a:t>
+            </a:fld>
+            <a:endParaRPr lang="ko-KR" altLang="en-US"/>
+          </a:p>
+        </p:txBody>
+      </p:sp>
+    </p:spTree>
+    <p:extLst>
+      <p:ext uri="{BB962C8B-B14F-4D97-AF65-F5344CB8AC3E}">
+        <p14:creationId xmlns:p14="http://schemas.microsoft.com/office/powerpoint/2010/main" val="328024503"/>
+      </p:ext>
+    </p:extLst>
+  </p:cSld>
+  <p:clrMapOvr>
+    <a:masterClrMapping/>
+  </p:clrMapOvr>
+</p:notes>
+</file>
+
+<file path=ppt/notesSlides/notesSlide12.xml><?xml version="1.0" encoding="utf-8"?>
+<p:notes xmlns:a="http://schemas.openxmlformats.org/drawingml/2006/main" xmlns:r="http://schemas.openxmlformats.org/officeDocument/2006/relationships" xmlns:p="http://schemas.openxmlformats.org/presentationml/2006/main">
+  <p:cSld>
+    <p:spTree>
+      <p:nvGrpSpPr>
+        <p:cNvPr id="1" name=""/>
+        <p:cNvGrpSpPr/>
+        <p:nvPr/>
+      </p:nvGrpSpPr>
+      <p:grpSpPr>
+        <a:xfrm>
+          <a:off x="0" y="0"/>
+          <a:ext cx="0" cy="0"/>
+          <a:chOff x="0" y="0"/>
+          <a:chExt cx="0" cy="0"/>
+        </a:xfrm>
+      </p:grpSpPr>
+      <p:sp>
+        <p:nvSpPr>
+          <p:cNvPr id="2" name="슬라이드 이미지 개체 틀 1"/>
+          <p:cNvSpPr>
+            <a:spLocks noGrp="1" noRot="1" noChangeAspect="1"/>
+          </p:cNvSpPr>
+          <p:nvPr>
+            <p:ph type="sldImg"/>
+          </p:nvPr>
+        </p:nvSpPr>
+        <p:spPr/>
+      </p:sp>
+      <p:sp>
+        <p:nvSpPr>
+          <p:cNvPr id="3" name="슬라이드 노트 개체 틀 2"/>
+          <p:cNvSpPr>
+            <a:spLocks noGrp="1"/>
+          </p:cNvSpPr>
+          <p:nvPr>
+            <p:ph type="body" idx="1"/>
+          </p:nvPr>
+        </p:nvSpPr>
+        <p:spPr/>
+        <p:txBody>
+          <a:bodyPr/>
+          <a:lstStyle/>
+          <a:p>
+            <a:endParaRPr lang="en-US" altLang="ko-KR" dirty="0"/>
+          </a:p>
+        </p:txBody>
+      </p:sp>
+      <p:sp>
+        <p:nvSpPr>
+          <p:cNvPr id="4" name="슬라이드 번호 개체 틀 3"/>
+          <p:cNvSpPr>
+            <a:spLocks noGrp="1"/>
+          </p:cNvSpPr>
+          <p:nvPr>
+            <p:ph type="sldNum" sz="quarter" idx="5"/>
+          </p:nvPr>
+        </p:nvSpPr>
+        <p:spPr/>
+        <p:txBody>
+          <a:bodyPr/>
+          <a:lstStyle/>
+          <a:p>
+            <a:fld id="{C09E5BFC-1559-42F1-8940-AB342D56BF02}" type="slidenum">
+              <a:rPr lang="ko-KR" altLang="en-US" smtClean="0"/>
+              <a:t>23</a:t>
+            </a:fld>
+            <a:endParaRPr lang="ko-KR" altLang="en-US"/>
+          </a:p>
+        </p:txBody>
+      </p:sp>
+    </p:spTree>
+    <p:extLst>
+      <p:ext uri="{BB962C8B-B14F-4D97-AF65-F5344CB8AC3E}">
+        <p14:creationId xmlns:p14="http://schemas.microsoft.com/office/powerpoint/2010/main" val="2691871518"/>
+      </p:ext>
+    </p:extLst>
+  </p:cSld>
+  <p:clrMapOvr>
+    <a:masterClrMapping/>
+  </p:clrMapOvr>
+</p:notes>
+</file>
+
+<file path=ppt/notesSlides/notesSlide13.xml><?xml version="1.0" encoding="utf-8"?>
+<p:notes xmlns:a="http://schemas.openxmlformats.org/drawingml/2006/main" xmlns:r="http://schemas.openxmlformats.org/officeDocument/2006/relationships" xmlns:p="http://schemas.openxmlformats.org/presentationml/2006/main">
+  <p:cSld>
+    <p:spTree>
+      <p:nvGrpSpPr>
+        <p:cNvPr id="1" name=""/>
+        <p:cNvGrpSpPr/>
+        <p:nvPr/>
+      </p:nvGrpSpPr>
+      <p:grpSpPr>
+        <a:xfrm>
+          <a:off x="0" y="0"/>
+          <a:ext cx="0" cy="0"/>
+          <a:chOff x="0" y="0"/>
+          <a:chExt cx="0" cy="0"/>
+        </a:xfrm>
+      </p:grpSpPr>
+      <p:sp>
+        <p:nvSpPr>
+          <p:cNvPr id="2" name="슬라이드 이미지 개체 틀 1"/>
+          <p:cNvSpPr>
+            <a:spLocks noGrp="1" noRot="1" noChangeAspect="1"/>
+          </p:cNvSpPr>
+          <p:nvPr>
+            <p:ph type="sldImg"/>
+          </p:nvPr>
+        </p:nvSpPr>
+        <p:spPr/>
+      </p:sp>
+      <p:sp>
+        <p:nvSpPr>
+          <p:cNvPr id="3" name="슬라이드 노트 개체 틀 2"/>
+          <p:cNvSpPr>
+            <a:spLocks noGrp="1"/>
+          </p:cNvSpPr>
+          <p:nvPr>
+            <p:ph type="body" idx="1"/>
+          </p:nvPr>
+        </p:nvSpPr>
+        <p:spPr/>
+        <p:txBody>
+          <a:bodyPr/>
+          <a:lstStyle/>
+          <a:p>
+            <a:endParaRPr lang="en-US" altLang="ko-KR" dirty="0"/>
+          </a:p>
+        </p:txBody>
+      </p:sp>
+      <p:sp>
+        <p:nvSpPr>
+          <p:cNvPr id="4" name="슬라이드 번호 개체 틀 3"/>
+          <p:cNvSpPr>
+            <a:spLocks noGrp="1"/>
+          </p:cNvSpPr>
+          <p:nvPr>
+            <p:ph type="sldNum" sz="quarter" idx="5"/>
+          </p:nvPr>
+        </p:nvSpPr>
+        <p:spPr/>
+        <p:txBody>
+          <a:bodyPr/>
+          <a:lstStyle/>
+          <a:p>
+            <a:fld id="{C09E5BFC-1559-42F1-8940-AB342D56BF02}" type="slidenum">
+              <a:rPr lang="ko-KR" altLang="en-US" smtClean="0"/>
+              <a:t>24</a:t>
+            </a:fld>
+            <a:endParaRPr lang="ko-KR" altLang="en-US"/>
+          </a:p>
+        </p:txBody>
+      </p:sp>
+    </p:spTree>
+    <p:extLst>
+      <p:ext uri="{BB962C8B-B14F-4D97-AF65-F5344CB8AC3E}">
+        <p14:creationId xmlns:p14="http://schemas.microsoft.com/office/powerpoint/2010/main" val="3184976362"/>
+      </p:ext>
+    </p:extLst>
+  </p:cSld>
+  <p:clrMapOvr>
+    <a:masterClrMapping/>
+  </p:clrMapOvr>
+</p:notes>
+</file>
+
 <file path=ppt/notesSlides/notesSlide2.xml><?xml version="1.0" encoding="utf-8"?>
 <p:notes xmlns:a="http://schemas.openxmlformats.org/drawingml/2006/main" xmlns:r="http://schemas.openxmlformats.org/officeDocument/2006/relationships" xmlns:p="http://schemas.openxmlformats.org/presentationml/2006/main">
   <p:cSld>
@@ -902,14 +1271,7 @@
           <a:bodyPr/>
           <a:lstStyle/>
           <a:p>
-            <a:r>
-              <a:rPr lang="en-US" altLang="ko-KR" dirty="0"/>
-              <a:t>... </a:t>
-            </a:r>
-            <a:r>
-              <a:rPr lang="ko-KR" altLang="en-US" dirty="0"/>
-              <a:t>이 연산자</a:t>
-            </a:r>
+            <a:endParaRPr lang="ko-KR" altLang="en-US" dirty="0"/>
           </a:p>
         </p:txBody>
       </p:sp>
@@ -928,9 +1290,9 @@
           <a:bodyPr/>
           <a:lstStyle/>
           <a:p>
-            <a:fld id="{6305A4A6-1964-497D-80B2-C6696AAF8B47}" type="slidenum">
+            <a:fld id="{855EC434-4F2C-4009-A759-466C4FEA3110}" type="slidenum">
               <a:rPr lang="ko-KR" altLang="en-US" smtClean="0"/>
-              <a:t>12</a:t>
+              <a:t>8</a:t>
             </a:fld>
             <a:endParaRPr lang="ko-KR" altLang="en-US"/>
           </a:p>
@@ -939,7 +1301,7 @@
     </p:spTree>
     <p:extLst>
       <p:ext uri="{BB962C8B-B14F-4D97-AF65-F5344CB8AC3E}">
-        <p14:creationId xmlns:p14="http://schemas.microsoft.com/office/powerpoint/2010/main" val="3129688339"/>
+        <p14:creationId xmlns:p14="http://schemas.microsoft.com/office/powerpoint/2010/main" val="943152927"/>
       </p:ext>
     </p:extLst>
   </p:cSld>
@@ -994,47 +1356,13 @@
           <a:lstStyle/>
           <a:p>
             <a:r>
+              <a:rPr lang="en-US" altLang="ko-KR" dirty="0"/>
+              <a:t>... </a:t>
+            </a:r>
+            <a:r>
               <a:rPr lang="ko-KR" altLang="en-US" dirty="0"/>
-              <a:t>배열 자체를 </a:t>
-            </a:r>
-            <a:r>
-              <a:rPr lang="en-US" altLang="ko-KR" dirty="0"/>
-              <a:t>arr3 =[arr1, arr2] </a:t>
-            </a:r>
-            <a:r>
-              <a:rPr lang="ko-KR" altLang="en-US" dirty="0"/>
-              <a:t>초기화 시키면 이차원 배열이 </a:t>
-            </a:r>
-            <a:r>
-              <a:rPr lang="ko-KR" altLang="en-US" dirty="0" err="1"/>
-              <a:t>되는거고</a:t>
-            </a:r>
-            <a:endParaRPr lang="en-US" altLang="ko-KR" dirty="0"/>
-          </a:p>
-          <a:p>
-            <a:r>
-              <a:rPr lang="ko-KR" altLang="en-US" dirty="0"/>
-              <a:t>배열의 요소를 합치기 위해서는 전개구문 사용할 수 있음</a:t>
-            </a:r>
-            <a:endParaRPr lang="en-US" altLang="ko-KR" dirty="0"/>
-          </a:p>
-          <a:p>
-            <a:endParaRPr lang="en-US" altLang="ko-KR" dirty="0"/>
-          </a:p>
-          <a:p>
-            <a:r>
-              <a:rPr lang="ko-KR" altLang="en-US" dirty="0"/>
-              <a:t>물론 전개구문이 아니고 배열의 </a:t>
-            </a:r>
-            <a:r>
-              <a:rPr lang="ko-KR" altLang="en-US" dirty="0" err="1"/>
-              <a:t>메소드라든지</a:t>
-            </a:r>
-            <a:r>
-              <a:rPr lang="en-US" altLang="ko-KR" dirty="0"/>
-              <a:t>, </a:t>
-            </a:r>
-            <a:endParaRPr lang="ko-KR" altLang="en-US" dirty="0"/>
+              <a:t>이 연산자</a:t>
+            </a:r>
           </a:p>
         </p:txBody>
       </p:sp>
@@ -1055,7 +1383,7 @@
           <a:p>
             <a:fld id="{6305A4A6-1964-497D-80B2-C6696AAF8B47}" type="slidenum">
               <a:rPr lang="ko-KR" altLang="en-US" smtClean="0"/>
-              <a:t>13</a:t>
+              <a:t>12</a:t>
             </a:fld>
             <a:endParaRPr lang="ko-KR" altLang="en-US"/>
           </a:p>
@@ -1064,7 +1392,7 @@
     </p:spTree>
     <p:extLst>
       <p:ext uri="{BB962C8B-B14F-4D97-AF65-F5344CB8AC3E}">
-        <p14:creationId xmlns:p14="http://schemas.microsoft.com/office/powerpoint/2010/main" val="2901632117"/>
+        <p14:creationId xmlns:p14="http://schemas.microsoft.com/office/powerpoint/2010/main" val="3129688339"/>
       </p:ext>
     </p:extLst>
   </p:cSld>
@@ -1120,11 +1448,44 @@
           <a:p>
             <a:r>
               <a:rPr lang="ko-KR" altLang="en-US" dirty="0"/>
-              <a:t>유사배열 객체를 배열로 만들 수 </a:t>
+              <a:t>배열 자체를 </a:t>
+            </a:r>
+            <a:r>
+              <a:rPr lang="en-US" altLang="ko-KR" dirty="0"/>
+              <a:t>arr3 =[arr1, arr2] </a:t>
+            </a:r>
+            <a:r>
+              <a:rPr lang="ko-KR" altLang="en-US" dirty="0"/>
+              <a:t>초기화 시키면 이차원 배열이 </a:t>
             </a:r>
             <a:r>
               <a:rPr lang="ko-KR" altLang="en-US" dirty="0" err="1"/>
-              <a:t>있ㅇㅁ</a:t>
+              <a:t>되는거고</a:t>
+            </a:r>
+            <a:endParaRPr lang="en-US" altLang="ko-KR" dirty="0"/>
+          </a:p>
+          <a:p>
+            <a:r>
+              <a:rPr lang="ko-KR" altLang="en-US" dirty="0"/>
+              <a:t>배열의 요소를 합치기 위해서는 전개구문 사용할 수 있음</a:t>
+            </a:r>
+            <a:endParaRPr lang="en-US" altLang="ko-KR" dirty="0"/>
+          </a:p>
+          <a:p>
+            <a:endParaRPr lang="en-US" altLang="ko-KR" dirty="0"/>
+          </a:p>
+          <a:p>
+            <a:r>
+              <a:rPr lang="ko-KR" altLang="en-US" dirty="0"/>
+              <a:t>물론 전개구문이 아니고 배열의 </a:t>
+            </a:r>
+            <a:r>
+              <a:rPr lang="ko-KR" altLang="en-US" dirty="0" err="1"/>
+              <a:t>메소드라든지</a:t>
+            </a:r>
+            <a:r>
+              <a:rPr lang="en-US" altLang="ko-KR" dirty="0"/>
+              <a:t>, </a:t>
             </a:r>
             <a:endParaRPr lang="ko-KR" altLang="en-US" dirty="0"/>
           </a:p>
@@ -1147,7 +1508,7 @@
           <a:p>
             <a:fld id="{6305A4A6-1964-497D-80B2-C6696AAF8B47}" type="slidenum">
               <a:rPr lang="ko-KR" altLang="en-US" smtClean="0"/>
-              <a:t>14</a:t>
+              <a:t>13</a:t>
             </a:fld>
             <a:endParaRPr lang="ko-KR" altLang="en-US"/>
           </a:p>
@@ -1156,7 +1517,7 @@
     </p:spTree>
     <p:extLst>
       <p:ext uri="{BB962C8B-B14F-4D97-AF65-F5344CB8AC3E}">
-        <p14:creationId xmlns:p14="http://schemas.microsoft.com/office/powerpoint/2010/main" val="3842675937"/>
+        <p14:creationId xmlns:p14="http://schemas.microsoft.com/office/powerpoint/2010/main" val="2901632117"/>
       </p:ext>
     </p:extLst>
   </p:cSld>
@@ -1211,8 +1572,12 @@
           <a:lstStyle/>
           <a:p>
             <a:r>
-              <a:rPr lang="en-US" altLang="ko-KR" dirty="0" err="1"/>
-              <a:t>constructi</a:t>
+              <a:rPr lang="ko-KR" altLang="en-US" dirty="0"/>
+              <a:t>유사배열 객체를 배열로 만들 수 </a:t>
+            </a:r>
+            <a:r>
+              <a:rPr lang="ko-KR" altLang="en-US" dirty="0" err="1"/>
+              <a:t>있ㅇㅁ</a:t>
             </a:r>
             <a:endParaRPr lang="ko-KR" altLang="en-US" dirty="0"/>
           </a:p>
@@ -1225,7 +1590,7 @@
             <a:spLocks noGrp="1"/>
           </p:cNvSpPr>
           <p:nvPr>
-            <p:ph type="sldNum" sz="quarter" idx="10"/>
+            <p:ph type="sldNum" sz="quarter" idx="5"/>
           </p:nvPr>
         </p:nvSpPr>
         <p:spPr/>
@@ -1235,7 +1600,7 @@
           <a:p>
             <a:fld id="{6305A4A6-1964-497D-80B2-C6696AAF8B47}" type="slidenum">
               <a:rPr lang="ko-KR" altLang="en-US" smtClean="0"/>
-              <a:t>19</a:t>
+              <a:t>14</a:t>
             </a:fld>
             <a:endParaRPr lang="ko-KR" altLang="en-US"/>
           </a:p>
@@ -1244,7 +1609,7 @@
     </p:spTree>
     <p:extLst>
       <p:ext uri="{BB962C8B-B14F-4D97-AF65-F5344CB8AC3E}">
-        <p14:creationId xmlns:p14="http://schemas.microsoft.com/office/powerpoint/2010/main" val="88659438"/>
+        <p14:creationId xmlns:p14="http://schemas.microsoft.com/office/powerpoint/2010/main" val="3842675937"/>
       </p:ext>
     </p:extLst>
   </p:cSld>
@@ -1298,37 +1663,7 @@
           <a:bodyPr/>
           <a:lstStyle/>
           <a:p>
-            <a:r>
-              <a:rPr lang="ko-KR" altLang="en-US" dirty="0"/>
-              <a:t>상속부터는 사실 몰라도 되지 않을까</a:t>
-            </a:r>
-            <a:r>
-              <a:rPr lang="en-US" altLang="ko-KR" dirty="0"/>
-              <a:t>?</a:t>
-            </a:r>
-          </a:p>
-          <a:p>
-            <a:r>
-              <a:rPr lang="en-US" altLang="ko-KR" dirty="0"/>
-              <a:t>super</a:t>
-            </a:r>
-            <a:r>
-              <a:rPr lang="en-US" altLang="ko-KR" baseline="0" dirty="0"/>
-              <a:t> </a:t>
-            </a:r>
-            <a:r>
-              <a:rPr lang="ko-KR" altLang="en-US" baseline="0" dirty="0"/>
-              <a:t>와 </a:t>
-            </a:r>
-            <a:r>
-              <a:rPr lang="en-US" altLang="ko-KR" baseline="0" dirty="0"/>
-              <a:t>overriding</a:t>
-            </a:r>
-            <a:r>
-              <a:rPr lang="ko-KR" altLang="en-US" baseline="0" dirty="0"/>
-              <a:t>은 코드에서 설명</a:t>
-            </a:r>
-            <a:endParaRPr lang="ko-KR" altLang="en-US" dirty="0"/>
+            <a:endParaRPr lang="en-US" altLang="ko-KR" dirty="0"/>
           </a:p>
         </p:txBody>
       </p:sp>
@@ -1339,7 +1674,7 @@
             <a:spLocks noGrp="1"/>
           </p:cNvSpPr>
           <p:nvPr>
-            <p:ph type="sldNum" sz="quarter" idx="10"/>
+            <p:ph type="sldNum" sz="quarter" idx="5"/>
           </p:nvPr>
         </p:nvSpPr>
         <p:spPr/>
@@ -1347,9 +1682,9 @@
           <a:bodyPr/>
           <a:lstStyle/>
           <a:p>
-            <a:fld id="{6305A4A6-1964-497D-80B2-C6696AAF8B47}" type="slidenum">
+            <a:fld id="{C09E5BFC-1559-42F1-8940-AB342D56BF02}" type="slidenum">
               <a:rPr lang="ko-KR" altLang="en-US" smtClean="0"/>
-              <a:t>22</a:t>
+              <a:t>17</a:t>
             </a:fld>
             <a:endParaRPr lang="ko-KR" altLang="en-US"/>
           </a:p>
@@ -1358,7 +1693,7 @@
     </p:spTree>
     <p:extLst>
       <p:ext uri="{BB962C8B-B14F-4D97-AF65-F5344CB8AC3E}">
-        <p14:creationId xmlns:p14="http://schemas.microsoft.com/office/powerpoint/2010/main" val="328024503"/>
+        <p14:creationId xmlns:p14="http://schemas.microsoft.com/office/powerpoint/2010/main" val="3338602734"/>
       </p:ext>
     </p:extLst>
   </p:cSld>
@@ -5280,7 +5615,7 @@
           <a:p>
             <a:fld id="{0F78D9C4-20C1-4B15-A116-16DC77AD9A1E}" type="datetime1">
               <a:rPr lang="ko-KR" altLang="en-US" smtClean="0"/>
-              <a:t>2024-06-04</a:t>
+              <a:t>2024-06-05</a:t>
             </a:fld>
             <a:endParaRPr lang="ko-KR" altLang="en-US"/>
           </a:p>
@@ -7424,413 +7759,6 @@
       </p:grpSpPr>
       <p:sp>
         <p:nvSpPr>
-          <p:cNvPr id="2" name="내용 개체 틀 1">
-            <a:extLst>
-              <a:ext uri="{FF2B5EF4-FFF2-40B4-BE49-F238E27FC236}">
-                <a16:creationId xmlns:a16="http://schemas.microsoft.com/office/drawing/2014/main" id="{E49F7F16-4879-CA79-968A-5F7FA45D8D4B}"/>
-              </a:ext>
-            </a:extLst>
-          </p:cNvPr>
-          <p:cNvSpPr>
-            <a:spLocks noGrp="1"/>
-          </p:cNvSpPr>
-          <p:nvPr>
-            <p:ph idx="1"/>
-          </p:nvPr>
-        </p:nvSpPr>
-        <p:spPr/>
-        <p:txBody>
-          <a:bodyPr/>
-          <a:lstStyle/>
-          <a:p>
-            <a:r>
-              <a:rPr lang="en-US" altLang="ko-KR" dirty="0"/>
-              <a:t>const word1= “</a:t>
-            </a:r>
-            <a:r>
-              <a:rPr lang="en-US" altLang="ko-KR" dirty="0" err="1"/>
-              <a:t>abc</a:t>
-            </a:r>
-            <a:r>
-              <a:rPr lang="en-US" altLang="ko-KR" dirty="0"/>
-              <a:t>”;</a:t>
-            </a:r>
-            <a:br>
-              <a:rPr lang="en-US" altLang="ko-KR" dirty="0"/>
-            </a:br>
-            <a:r>
-              <a:rPr lang="en-US" altLang="ko-KR" dirty="0"/>
-              <a:t>const word2 =“</a:t>
-            </a:r>
-            <a:r>
-              <a:rPr lang="en-US" altLang="ko-KR" dirty="0" err="1"/>
-              <a:t>xyz</a:t>
-            </a:r>
-            <a:r>
-              <a:rPr lang="en-US" altLang="ko-KR" dirty="0"/>
-              <a:t>”;</a:t>
-            </a:r>
-            <a:br>
-              <a:rPr lang="en-US" altLang="ko-KR" dirty="0"/>
-            </a:br>
-            <a:r>
-              <a:rPr lang="ko-KR" altLang="en-US" dirty="0"/>
-              <a:t>로 선언</a:t>
-            </a:r>
-            <a:endParaRPr lang="en-US" altLang="ko-KR" dirty="0"/>
-          </a:p>
-          <a:p>
-            <a:endParaRPr lang="en-US" altLang="ko-KR" dirty="0"/>
-          </a:p>
-          <a:p>
-            <a:r>
-              <a:rPr lang="ko-KR" altLang="en-US" dirty="0"/>
-              <a:t>두 개의 문자열을 합쳐서 배열로 만들기</a:t>
-            </a:r>
-            <a:endParaRPr lang="en-US" altLang="ko-KR" dirty="0"/>
-          </a:p>
-          <a:p>
-            <a:endParaRPr lang="en-US" altLang="ko-KR" dirty="0"/>
-          </a:p>
-          <a:p>
-            <a:r>
-              <a:rPr lang="ko-KR" altLang="en-US" dirty="0"/>
-              <a:t>결과물</a:t>
-            </a:r>
-          </a:p>
-          <a:p>
-            <a:endParaRPr lang="ko-KR" altLang="en-US" dirty="0"/>
-          </a:p>
-        </p:txBody>
-      </p:sp>
-      <p:sp>
-        <p:nvSpPr>
-          <p:cNvPr id="3" name="날짜 개체 틀 2">
-            <a:extLst>
-              <a:ext uri="{FF2B5EF4-FFF2-40B4-BE49-F238E27FC236}">
-                <a16:creationId xmlns:a16="http://schemas.microsoft.com/office/drawing/2014/main" id="{E6820CE1-F4AF-44A3-4FA2-01E2AC7B4263}"/>
-              </a:ext>
-            </a:extLst>
-          </p:cNvPr>
-          <p:cNvSpPr>
-            <a:spLocks noGrp="1"/>
-          </p:cNvSpPr>
-          <p:nvPr>
-            <p:ph type="dt" sz="half" idx="10"/>
-          </p:nvPr>
-        </p:nvSpPr>
-        <p:spPr/>
-        <p:txBody>
-          <a:bodyPr/>
-          <a:lstStyle/>
-          <a:p>
-            <a:fld id="{3C9CE3CE-253F-4F9D-BA15-C226C8D8501E}" type="datetime6">
-              <a:rPr lang="ko-KR" altLang="en-US" smtClean="0"/>
-              <a:t>2024년 6월</a:t>
-            </a:fld>
-            <a:endParaRPr lang="ko-KR" altLang="en-US"/>
-          </a:p>
-        </p:txBody>
-      </p:sp>
-      <p:sp>
-        <p:nvSpPr>
-          <p:cNvPr id="4" name="슬라이드 번호 개체 틀 3">
-            <a:extLst>
-              <a:ext uri="{FF2B5EF4-FFF2-40B4-BE49-F238E27FC236}">
-                <a16:creationId xmlns:a16="http://schemas.microsoft.com/office/drawing/2014/main" id="{36CE0B56-DA1F-A295-58E6-5139A49CA7A4}"/>
-              </a:ext>
-            </a:extLst>
-          </p:cNvPr>
-          <p:cNvSpPr>
-            <a:spLocks noGrp="1"/>
-          </p:cNvSpPr>
-          <p:nvPr>
-            <p:ph type="sldNum" sz="quarter" idx="12"/>
-          </p:nvPr>
-        </p:nvSpPr>
-        <p:spPr/>
-        <p:txBody>
-          <a:bodyPr/>
-          <a:lstStyle/>
-          <a:p>
-            <a:fld id="{083A2CE0-18CD-4102-B738-4ACFF9E68BA4}" type="slidenum">
-              <a:rPr lang="ko-KR" altLang="en-US" smtClean="0"/>
-              <a:t>15</a:t>
-            </a:fld>
-            <a:endParaRPr lang="ko-KR" altLang="en-US"/>
-          </a:p>
-        </p:txBody>
-      </p:sp>
-      <p:sp>
-        <p:nvSpPr>
-          <p:cNvPr id="5" name="제목 4">
-            <a:extLst>
-              <a:ext uri="{FF2B5EF4-FFF2-40B4-BE49-F238E27FC236}">
-                <a16:creationId xmlns:a16="http://schemas.microsoft.com/office/drawing/2014/main" id="{E34B2F78-686D-171F-36D5-8B77CFF0CDDC}"/>
-              </a:ext>
-            </a:extLst>
-          </p:cNvPr>
-          <p:cNvSpPr>
-            <a:spLocks noGrp="1"/>
-          </p:cNvSpPr>
-          <p:nvPr>
-            <p:ph type="title"/>
-          </p:nvPr>
-        </p:nvSpPr>
-        <p:spPr/>
-        <p:txBody>
-          <a:bodyPr/>
-          <a:lstStyle/>
-          <a:p>
-            <a:r>
-              <a:rPr lang="ko-KR" altLang="en-US" dirty="0">
-                <a:solidFill>
-                  <a:schemeClr val="accent1"/>
-                </a:solidFill>
-              </a:rPr>
-              <a:t>실습</a:t>
-            </a:r>
-            <a:r>
-              <a:rPr lang="en-US" altLang="ko-KR" dirty="0">
-                <a:solidFill>
-                  <a:schemeClr val="accent1"/>
-                </a:solidFill>
-              </a:rPr>
-              <a:t>.</a:t>
-            </a:r>
-            <a:r>
-              <a:rPr lang="en-US" altLang="ko-KR" dirty="0"/>
-              <a:t> Spread </a:t>
-            </a:r>
-            <a:r>
-              <a:rPr lang="ko-KR" altLang="en-US" dirty="0"/>
-              <a:t>연산자 사용하기</a:t>
-            </a:r>
-          </a:p>
-        </p:txBody>
-      </p:sp>
-      <p:sp>
-        <p:nvSpPr>
-          <p:cNvPr id="6" name="TextBox 5">
-            <a:extLst>
-              <a:ext uri="{FF2B5EF4-FFF2-40B4-BE49-F238E27FC236}">
-                <a16:creationId xmlns:a16="http://schemas.microsoft.com/office/drawing/2014/main" id="{D6DE0FC0-5275-6B81-0335-24132377F42B}"/>
-              </a:ext>
-            </a:extLst>
-          </p:cNvPr>
-          <p:cNvSpPr txBox="1"/>
-          <p:nvPr/>
-        </p:nvSpPr>
-        <p:spPr>
-          <a:xfrm>
-            <a:off x="2208770" y="4615935"/>
-            <a:ext cx="4377381" cy="461665"/>
-          </a:xfrm>
-          <a:prstGeom prst="rect">
-            <a:avLst/>
-          </a:prstGeom>
-          <a:solidFill>
-            <a:srgbClr val="002060"/>
-          </a:solidFill>
-        </p:spPr>
-        <p:txBody>
-          <a:bodyPr wrap="square">
-            <a:spAutoFit/>
-          </a:bodyPr>
-          <a:lstStyle/>
-          <a:p>
-            <a:r>
-              <a:rPr lang="en-US" altLang="ko-KR" sz="2400" b="0" dirty="0">
-                <a:solidFill>
-                  <a:srgbClr val="9ABDF5"/>
-                </a:solidFill>
-                <a:effectLst/>
-                <a:latin typeface="Consolas" panose="020B0609020204030204" pitchFamily="49" charset="0"/>
-              </a:rPr>
-              <a:t>[</a:t>
-            </a:r>
-            <a:r>
-              <a:rPr lang="en-US" altLang="ko-KR" sz="2400" b="0" dirty="0">
-                <a:solidFill>
-                  <a:srgbClr val="89DDFF"/>
-                </a:solidFill>
-                <a:effectLst/>
-                <a:latin typeface="Consolas" panose="020B0609020204030204" pitchFamily="49" charset="0"/>
-              </a:rPr>
-              <a:t>"</a:t>
-            </a:r>
-            <a:r>
-              <a:rPr lang="en-US" altLang="ko-KR" sz="2400" b="0" dirty="0" err="1">
-                <a:solidFill>
-                  <a:srgbClr val="9ECE6A"/>
-                </a:solidFill>
-                <a:effectLst/>
-                <a:latin typeface="Consolas" panose="020B0609020204030204" pitchFamily="49" charset="0"/>
-              </a:rPr>
-              <a:t>a</a:t>
-            </a:r>
-            <a:r>
-              <a:rPr lang="en-US" altLang="ko-KR" sz="2400" b="0" dirty="0" err="1">
-                <a:solidFill>
-                  <a:srgbClr val="89DDFF"/>
-                </a:solidFill>
-                <a:effectLst/>
-                <a:latin typeface="Consolas" panose="020B0609020204030204" pitchFamily="49" charset="0"/>
-              </a:rPr>
-              <a:t>","</a:t>
-            </a:r>
-            <a:r>
-              <a:rPr lang="en-US" altLang="ko-KR" sz="2400" b="0" dirty="0" err="1">
-                <a:solidFill>
-                  <a:srgbClr val="9ECE6A"/>
-                </a:solidFill>
-                <a:effectLst/>
-                <a:latin typeface="Consolas" panose="020B0609020204030204" pitchFamily="49" charset="0"/>
-              </a:rPr>
-              <a:t>b</a:t>
-            </a:r>
-            <a:r>
-              <a:rPr lang="en-US" altLang="ko-KR" sz="2400" b="0" dirty="0" err="1">
-                <a:solidFill>
-                  <a:srgbClr val="89DDFF"/>
-                </a:solidFill>
-                <a:effectLst/>
-                <a:latin typeface="Consolas" panose="020B0609020204030204" pitchFamily="49" charset="0"/>
-              </a:rPr>
-              <a:t>","</a:t>
-            </a:r>
-            <a:r>
-              <a:rPr lang="en-US" altLang="ko-KR" sz="2400" b="0" dirty="0" err="1">
-                <a:solidFill>
-                  <a:srgbClr val="9ECE6A"/>
-                </a:solidFill>
-                <a:effectLst/>
-                <a:latin typeface="Consolas" panose="020B0609020204030204" pitchFamily="49" charset="0"/>
-              </a:rPr>
-              <a:t>c</a:t>
-            </a:r>
-            <a:r>
-              <a:rPr lang="en-US" altLang="ko-KR" sz="2400" b="0" dirty="0" err="1">
-                <a:solidFill>
-                  <a:srgbClr val="89DDFF"/>
-                </a:solidFill>
-                <a:effectLst/>
-                <a:latin typeface="Consolas" panose="020B0609020204030204" pitchFamily="49" charset="0"/>
-              </a:rPr>
-              <a:t>","</a:t>
-            </a:r>
-            <a:r>
-              <a:rPr lang="en-US" altLang="ko-KR" sz="2400" b="0" dirty="0" err="1">
-                <a:solidFill>
-                  <a:srgbClr val="9ECE6A"/>
-                </a:solidFill>
-                <a:effectLst/>
-                <a:latin typeface="Consolas" panose="020B0609020204030204" pitchFamily="49" charset="0"/>
-              </a:rPr>
-              <a:t>x</a:t>
-            </a:r>
-            <a:r>
-              <a:rPr lang="en-US" altLang="ko-KR" sz="2400" b="0" dirty="0" err="1">
-                <a:solidFill>
-                  <a:srgbClr val="89DDFF"/>
-                </a:solidFill>
-                <a:effectLst/>
-                <a:latin typeface="Consolas" panose="020B0609020204030204" pitchFamily="49" charset="0"/>
-              </a:rPr>
-              <a:t>","</a:t>
-            </a:r>
-            <a:r>
-              <a:rPr lang="en-US" altLang="ko-KR" sz="2400" b="0" dirty="0" err="1">
-                <a:solidFill>
-                  <a:srgbClr val="9ECE6A"/>
-                </a:solidFill>
-                <a:effectLst/>
-                <a:latin typeface="Consolas" panose="020B0609020204030204" pitchFamily="49" charset="0"/>
-              </a:rPr>
-              <a:t>y</a:t>
-            </a:r>
-            <a:r>
-              <a:rPr lang="en-US" altLang="ko-KR" sz="2400" b="0" dirty="0" err="1">
-                <a:solidFill>
-                  <a:srgbClr val="89DDFF"/>
-                </a:solidFill>
-                <a:effectLst/>
-                <a:latin typeface="Consolas" panose="020B0609020204030204" pitchFamily="49" charset="0"/>
-              </a:rPr>
-              <a:t>","</a:t>
-            </a:r>
-            <a:r>
-              <a:rPr lang="en-US" altLang="ko-KR" sz="2400" b="0" dirty="0" err="1">
-                <a:solidFill>
-                  <a:srgbClr val="9ECE6A"/>
-                </a:solidFill>
-                <a:effectLst/>
-                <a:latin typeface="Consolas" panose="020B0609020204030204" pitchFamily="49" charset="0"/>
-              </a:rPr>
-              <a:t>z</a:t>
-            </a:r>
-            <a:r>
-              <a:rPr lang="en-US" altLang="ko-KR" sz="2400" b="0" dirty="0">
-                <a:solidFill>
-                  <a:srgbClr val="89DDFF"/>
-                </a:solidFill>
-                <a:effectLst/>
-                <a:latin typeface="Consolas" panose="020B0609020204030204" pitchFamily="49" charset="0"/>
-              </a:rPr>
-              <a:t>"</a:t>
-            </a:r>
-            <a:r>
-              <a:rPr lang="en-US" altLang="ko-KR" sz="2400" b="0" dirty="0">
-                <a:solidFill>
-                  <a:srgbClr val="9ABDF5"/>
-                </a:solidFill>
-                <a:effectLst/>
-                <a:latin typeface="Consolas" panose="020B0609020204030204" pitchFamily="49" charset="0"/>
-              </a:rPr>
-              <a:t>]</a:t>
-            </a:r>
-            <a:endParaRPr lang="en-US" altLang="ko-KR" sz="2400" b="0" dirty="0">
-              <a:solidFill>
-                <a:srgbClr val="A9B1D6"/>
-              </a:solidFill>
-              <a:effectLst/>
-              <a:latin typeface="Consolas" panose="020B0609020204030204" pitchFamily="49" charset="0"/>
-            </a:endParaRPr>
-          </a:p>
-        </p:txBody>
-      </p:sp>
-    </p:spTree>
-    <p:extLst>
-      <p:ext uri="{BB962C8B-B14F-4D97-AF65-F5344CB8AC3E}">
-        <p14:creationId xmlns:p14="http://schemas.microsoft.com/office/powerpoint/2010/main" val="695268849"/>
-      </p:ext>
-    </p:extLst>
-  </p:cSld>
-  <p:clrMapOvr>
-    <a:masterClrMapping/>
-  </p:clrMapOvr>
-</p:sld>
-</file>
-
-<file path=ppt/slides/slide16.xml><?xml version="1.0" encoding="utf-8"?>
-<p:sld xmlns:a="http://schemas.openxmlformats.org/drawingml/2006/main" xmlns:r="http://schemas.openxmlformats.org/officeDocument/2006/relationships" xmlns:p="http://schemas.openxmlformats.org/presentationml/2006/main">
-  <p:cSld>
-    <p:spTree>
-      <p:nvGrpSpPr>
-        <p:cNvPr id="1" name=""/>
-        <p:cNvGrpSpPr/>
-        <p:nvPr/>
-      </p:nvGrpSpPr>
-      <p:grpSpPr>
-        <a:xfrm>
-          <a:off x="0" y="0"/>
-          <a:ext cx="0" cy="0"/>
-          <a:chOff x="0" y="0"/>
-          <a:chExt cx="0" cy="0"/>
-        </a:xfrm>
-      </p:grpSpPr>
-      <p:sp>
-        <p:nvSpPr>
           <p:cNvPr id="4" name="날짜 개체 틀 3">
             <a:extLst>
               <a:ext uri="{FF2B5EF4-FFF2-40B4-BE49-F238E27FC236}">
@@ -7852,7 +7780,7 @@
           <a:p>
             <a:fld id="{0F78D9C4-20C1-4B15-A116-16DC77AD9A1E}" type="datetime1">
               <a:rPr lang="ko-KR" altLang="en-US" smtClean="0"/>
-              <a:t>2024-06-04</a:t>
+              <a:t>2024-06-05</a:t>
             </a:fld>
             <a:endParaRPr lang="ko-KR" altLang="en-US"/>
           </a:p>
@@ -7881,7 +7809,7 @@
           <a:p>
             <a:fld id="{083A2CE0-18CD-4102-B738-4ACFF9E68BA4}" type="slidenum">
               <a:rPr lang="ko-KR" altLang="en-US" smtClean="0"/>
-              <a:t>16</a:t>
+              <a:t>15</a:t>
             </a:fld>
             <a:endParaRPr lang="ko-KR" altLang="en-US"/>
           </a:p>
@@ -7968,6 +7896,238 @@
 </p:sld>
 </file>
 
+<file path=ppt/slides/slide16.xml><?xml version="1.0" encoding="utf-8"?>
+<p:sld xmlns:a="http://schemas.openxmlformats.org/drawingml/2006/main" xmlns:r="http://schemas.openxmlformats.org/officeDocument/2006/relationships" xmlns:p="http://schemas.openxmlformats.org/presentationml/2006/main">
+  <p:cSld>
+    <p:spTree>
+      <p:nvGrpSpPr>
+        <p:cNvPr id="1" name=""/>
+        <p:cNvGrpSpPr/>
+        <p:nvPr/>
+      </p:nvGrpSpPr>
+      <p:grpSpPr>
+        <a:xfrm>
+          <a:off x="0" y="0"/>
+          <a:ext cx="0" cy="0"/>
+          <a:chOff x="0" y="0"/>
+          <a:chExt cx="0" cy="0"/>
+        </a:xfrm>
+      </p:grpSpPr>
+      <p:sp>
+        <p:nvSpPr>
+          <p:cNvPr id="3" name="내용 개체 틀 2">
+            <a:extLst>
+              <a:ext uri="{FF2B5EF4-FFF2-40B4-BE49-F238E27FC236}">
+                <a16:creationId xmlns:a16="http://schemas.microsoft.com/office/drawing/2014/main" id="{2C4D7EC5-CE6D-3A3F-9900-4B5C0C314401}"/>
+              </a:ext>
+            </a:extLst>
+          </p:cNvPr>
+          <p:cNvSpPr>
+            <a:spLocks noGrp="1"/>
+          </p:cNvSpPr>
+          <p:nvPr>
+            <p:ph idx="1"/>
+          </p:nvPr>
+        </p:nvSpPr>
+        <p:spPr/>
+        <p:txBody>
+          <a:bodyPr/>
+          <a:lstStyle/>
+          <a:p>
+            <a:pPr>
+              <a:lnSpc>
+                <a:spcPct val="150000"/>
+              </a:lnSpc>
+            </a:pPr>
+            <a:r>
+              <a:rPr lang="en-US" altLang="ko-KR" dirty="0"/>
+              <a:t>spread </a:t>
+            </a:r>
+            <a:r>
+              <a:rPr lang="ko-KR" altLang="en-US" dirty="0"/>
+              <a:t>파라미터</a:t>
+            </a:r>
+            <a:endParaRPr lang="en-US" altLang="ko-KR" dirty="0"/>
+          </a:p>
+          <a:p>
+            <a:pPr lvl="1">
+              <a:lnSpc>
+                <a:spcPct val="150000"/>
+              </a:lnSpc>
+            </a:pPr>
+            <a:r>
+              <a:rPr lang="ko-KR" altLang="en-US" dirty="0">
+                <a:solidFill>
+                  <a:schemeClr val="accent1"/>
+                </a:solidFill>
+              </a:rPr>
+              <a:t>호출하는</a:t>
+            </a:r>
+            <a:r>
+              <a:rPr lang="ko-KR" altLang="en-US" dirty="0"/>
+              <a:t> 함수의 파라미터에 사용</a:t>
+            </a:r>
+            <a:endParaRPr lang="en-US" altLang="ko-KR" dirty="0"/>
+          </a:p>
+          <a:p>
+            <a:pPr>
+              <a:lnSpc>
+                <a:spcPct val="150000"/>
+              </a:lnSpc>
+            </a:pPr>
+            <a:r>
+              <a:rPr lang="en-US" altLang="ko-KR" dirty="0"/>
+              <a:t>rest</a:t>
+            </a:r>
+            <a:r>
+              <a:rPr lang="ko-KR" altLang="en-US" dirty="0"/>
+              <a:t> 파라미터</a:t>
+            </a:r>
+            <a:endParaRPr lang="en-US" altLang="ko-KR" dirty="0"/>
+          </a:p>
+          <a:p>
+            <a:pPr lvl="1">
+              <a:lnSpc>
+                <a:spcPct val="150000"/>
+              </a:lnSpc>
+            </a:pPr>
+            <a:r>
+              <a:rPr lang="ko-KR" altLang="en-US" dirty="0" err="1">
+                <a:solidFill>
+                  <a:schemeClr val="accent1"/>
+                </a:solidFill>
+              </a:rPr>
+              <a:t>호출받는</a:t>
+            </a:r>
+            <a:r>
+              <a:rPr lang="ko-KR" altLang="en-US" dirty="0"/>
+              <a:t> 함수의 파라미터에 사용</a:t>
+            </a:r>
+            <a:endParaRPr lang="en-US" altLang="ko-KR" dirty="0"/>
+          </a:p>
+          <a:p>
+            <a:pPr lvl="1">
+              <a:lnSpc>
+                <a:spcPct val="150000"/>
+              </a:lnSpc>
+            </a:pPr>
+            <a:r>
+              <a:rPr lang="ko-KR" altLang="en-US" dirty="0"/>
+              <a:t>호출하는 함수의 파라미터 순서에 맞춰 값 설정 후 남은 파라미터 값을 배열로 설정</a:t>
+            </a:r>
+            <a:endParaRPr lang="en-US" altLang="ko-KR" dirty="0"/>
+          </a:p>
+          <a:p>
+            <a:pPr marL="0" indent="0">
+              <a:lnSpc>
+                <a:spcPct val="150000"/>
+              </a:lnSpc>
+              <a:buNone/>
+            </a:pPr>
+            <a:endParaRPr lang="ko-KR" altLang="en-US" dirty="0"/>
+          </a:p>
+        </p:txBody>
+      </p:sp>
+      <p:sp>
+        <p:nvSpPr>
+          <p:cNvPr id="4" name="날짜 개체 틀 3">
+            <a:extLst>
+              <a:ext uri="{FF2B5EF4-FFF2-40B4-BE49-F238E27FC236}">
+                <a16:creationId xmlns:a16="http://schemas.microsoft.com/office/drawing/2014/main" id="{1EC28B3E-7E46-8416-284F-F4F43A7E1966}"/>
+              </a:ext>
+            </a:extLst>
+          </p:cNvPr>
+          <p:cNvSpPr>
+            <a:spLocks noGrp="1"/>
+          </p:cNvSpPr>
+          <p:nvPr>
+            <p:ph type="dt" sz="half" idx="10"/>
+          </p:nvPr>
+        </p:nvSpPr>
+        <p:spPr/>
+        <p:txBody>
+          <a:bodyPr/>
+          <a:lstStyle/>
+          <a:p>
+            <a:fld id="{0F78D9C4-20C1-4B15-A116-16DC77AD9A1E}" type="datetime1">
+              <a:rPr lang="ko-KR" altLang="en-US" smtClean="0"/>
+              <a:t>2024-06-05</a:t>
+            </a:fld>
+            <a:endParaRPr lang="ko-KR" altLang="en-US"/>
+          </a:p>
+        </p:txBody>
+      </p:sp>
+      <p:sp>
+        <p:nvSpPr>
+          <p:cNvPr id="5" name="슬라이드 번호 개체 틀 4">
+            <a:extLst>
+              <a:ext uri="{FF2B5EF4-FFF2-40B4-BE49-F238E27FC236}">
+                <a16:creationId xmlns:a16="http://schemas.microsoft.com/office/drawing/2014/main" id="{54BF702D-FAA1-6C98-EA03-DB21846550A6}"/>
+              </a:ext>
+            </a:extLst>
+          </p:cNvPr>
+          <p:cNvSpPr>
+            <a:spLocks noGrp="1"/>
+          </p:cNvSpPr>
+          <p:nvPr>
+            <p:ph type="sldNum" sz="quarter" idx="12"/>
+          </p:nvPr>
+        </p:nvSpPr>
+        <p:spPr/>
+        <p:txBody>
+          <a:bodyPr/>
+          <a:lstStyle/>
+          <a:p>
+            <a:fld id="{083A2CE0-18CD-4102-B738-4ACFF9E68BA4}" type="slidenum">
+              <a:rPr lang="ko-KR" altLang="en-US" smtClean="0"/>
+              <a:t>16</a:t>
+            </a:fld>
+            <a:endParaRPr lang="ko-KR" altLang="en-US"/>
+          </a:p>
+        </p:txBody>
+      </p:sp>
+      <p:sp>
+        <p:nvSpPr>
+          <p:cNvPr id="2" name="제목 1">
+            <a:extLst>
+              <a:ext uri="{FF2B5EF4-FFF2-40B4-BE49-F238E27FC236}">
+                <a16:creationId xmlns:a16="http://schemas.microsoft.com/office/drawing/2014/main" id="{8F1FE8CF-671B-89FF-B68D-5BBADDECF5F9}"/>
+              </a:ext>
+            </a:extLst>
+          </p:cNvPr>
+          <p:cNvSpPr>
+            <a:spLocks noGrp="1"/>
+          </p:cNvSpPr>
+          <p:nvPr>
+            <p:ph type="title"/>
+          </p:nvPr>
+        </p:nvSpPr>
+        <p:spPr/>
+        <p:txBody>
+          <a:bodyPr/>
+          <a:lstStyle/>
+          <a:p>
+            <a:r>
+              <a:rPr lang="en-US" altLang="ko-KR" dirty="0"/>
+              <a:t>spread vs. rest</a:t>
+            </a:r>
+            <a:endParaRPr lang="ko-KR" altLang="en-US" dirty="0"/>
+          </a:p>
+        </p:txBody>
+      </p:sp>
+    </p:spTree>
+    <p:extLst>
+      <p:ext uri="{BB962C8B-B14F-4D97-AF65-F5344CB8AC3E}">
+        <p14:creationId xmlns:p14="http://schemas.microsoft.com/office/powerpoint/2010/main" val="3950963713"/>
+      </p:ext>
+    </p:extLst>
+  </p:cSld>
+  <p:clrMapOvr>
+    <a:masterClrMapping/>
+  </p:clrMapOvr>
+</p:sld>
+</file>
+
 <file path=ppt/slides/slide17.xml><?xml version="1.0" encoding="utf-8"?>
 <p:sld xmlns:a="http://schemas.openxmlformats.org/drawingml/2006/main" xmlns:r="http://schemas.openxmlformats.org/officeDocument/2006/relationships" xmlns:p="http://schemas.openxmlformats.org/presentationml/2006/main">
   <p:cSld>
@@ -7987,10 +8147,10 @@
       </p:grpSpPr>
       <p:sp>
         <p:nvSpPr>
-          <p:cNvPr id="3" name="내용 개체 틀 2">
+          <p:cNvPr id="13" name="내용 개체 틀 2">
             <a:extLst>
               <a:ext uri="{FF2B5EF4-FFF2-40B4-BE49-F238E27FC236}">
-                <a16:creationId xmlns:a16="http://schemas.microsoft.com/office/drawing/2014/main" id="{2C4D7EC5-CE6D-3A3F-9900-4B5C0C314401}"/>
+                <a16:creationId xmlns:a16="http://schemas.microsoft.com/office/drawing/2014/main" id="{847FD532-7F61-A001-537F-B970BD821AF3}"/>
               </a:ext>
             </a:extLst>
           </p:cNvPr>
@@ -8001,102 +8161,28 @@
             <p:ph idx="1"/>
           </p:nvPr>
         </p:nvSpPr>
-        <p:spPr/>
-        <p:txBody>
-          <a:bodyPr/>
+        <p:spPr>
+          <a:xfrm>
+            <a:off x="510988" y="1328391"/>
+            <a:ext cx="11260802" cy="5328442"/>
+          </a:xfrm>
+        </p:spPr>
+        <p:txBody>
+          <a:bodyPr>
+            <a:normAutofit/>
+          </a:bodyPr>
           <a:lstStyle/>
           <a:p>
-            <a:pPr>
-              <a:lnSpc>
-                <a:spcPct val="150000"/>
-              </a:lnSpc>
-            </a:pPr>
-            <a:r>
-              <a:rPr lang="en-US" altLang="ko-KR" dirty="0"/>
-              <a:t>spread </a:t>
-            </a:r>
-            <a:r>
-              <a:rPr lang="ko-KR" altLang="en-US" dirty="0"/>
-              <a:t>파라미터</a:t>
-            </a:r>
             <a:endParaRPr lang="en-US" altLang="ko-KR" dirty="0"/>
           </a:p>
           <a:p>
-            <a:pPr lvl="1">
-              <a:lnSpc>
-                <a:spcPct val="150000"/>
-              </a:lnSpc>
-            </a:pPr>
-            <a:r>
-              <a:rPr lang="ko-KR" altLang="en-US" dirty="0">
-                <a:solidFill>
-                  <a:schemeClr val="accent1"/>
-                </a:solidFill>
-              </a:rPr>
-              <a:t>호출하는</a:t>
-            </a:r>
-            <a:r>
-              <a:rPr lang="ko-KR" altLang="en-US" dirty="0"/>
-              <a:t> 함수의 파라미터에 사용</a:t>
-            </a:r>
-            <a:endParaRPr lang="en-US" altLang="ko-KR" dirty="0"/>
-          </a:p>
-          <a:p>
-            <a:pPr>
-              <a:lnSpc>
-                <a:spcPct val="150000"/>
-              </a:lnSpc>
-            </a:pPr>
-            <a:r>
-              <a:rPr lang="en-US" altLang="ko-KR" dirty="0"/>
-              <a:t>rest</a:t>
-            </a:r>
-            <a:r>
-              <a:rPr lang="ko-KR" altLang="en-US" dirty="0"/>
-              <a:t> 파라미터</a:t>
-            </a:r>
-            <a:endParaRPr lang="en-US" altLang="ko-KR" dirty="0"/>
-          </a:p>
-          <a:p>
-            <a:pPr lvl="1">
-              <a:lnSpc>
-                <a:spcPct val="150000"/>
-              </a:lnSpc>
-            </a:pPr>
-            <a:r>
-              <a:rPr lang="ko-KR" altLang="en-US" dirty="0" err="1">
-                <a:solidFill>
-                  <a:schemeClr val="accent1"/>
-                </a:solidFill>
-              </a:rPr>
-              <a:t>호출받는</a:t>
-            </a:r>
-            <a:r>
-              <a:rPr lang="ko-KR" altLang="en-US" dirty="0"/>
-              <a:t> 함수의 파라미터에 사용</a:t>
-            </a:r>
-            <a:endParaRPr lang="en-US" altLang="ko-KR" dirty="0"/>
-          </a:p>
-          <a:p>
-            <a:pPr lvl="1">
-              <a:lnSpc>
-                <a:spcPct val="150000"/>
-              </a:lnSpc>
-            </a:pPr>
-            <a:r>
-              <a:rPr lang="ko-KR" altLang="en-US" dirty="0"/>
-              <a:t>호출하는 함수의 파라미터 순서에 맞춰 값 설정 후 남은 파라미터 값을 배열로 설정</a:t>
-            </a:r>
-            <a:endParaRPr lang="en-US" altLang="ko-KR" dirty="0"/>
-          </a:p>
-          <a:p>
             <a:pPr marL="0" indent="0">
-              <a:lnSpc>
-                <a:spcPct val="150000"/>
-              </a:lnSpc>
               <a:buNone/>
             </a:pPr>
-            <a:endParaRPr lang="ko-KR" altLang="en-US" dirty="0"/>
+            <a:endParaRPr lang="en-US" altLang="ko-KR" dirty="0"/>
+          </a:p>
+          <a:p>
+            <a:endParaRPr lang="en-US" altLang="ko-KR" dirty="0"/>
           </a:p>
         </p:txBody>
       </p:sp>
@@ -8105,7 +8191,7 @@
           <p:cNvPr id="4" name="날짜 개체 틀 3">
             <a:extLst>
               <a:ext uri="{FF2B5EF4-FFF2-40B4-BE49-F238E27FC236}">
-                <a16:creationId xmlns:a16="http://schemas.microsoft.com/office/drawing/2014/main" id="{1EC28B3E-7E46-8416-284F-F4F43A7E1966}"/>
+                <a16:creationId xmlns:a16="http://schemas.microsoft.com/office/drawing/2014/main" id="{A695DDE5-0A39-A366-4CFE-A283911999CD}"/>
               </a:ext>
             </a:extLst>
           </p:cNvPr>
@@ -8123,7 +8209,7 @@
           <a:p>
             <a:fld id="{0F78D9C4-20C1-4B15-A116-16DC77AD9A1E}" type="datetime1">
               <a:rPr lang="ko-KR" altLang="en-US" smtClean="0"/>
-              <a:t>2024-06-04</a:t>
+              <a:t>2024-06-05</a:t>
             </a:fld>
             <a:endParaRPr lang="ko-KR" altLang="en-US"/>
           </a:p>
@@ -8134,7 +8220,7 @@
           <p:cNvPr id="5" name="슬라이드 번호 개체 틀 4">
             <a:extLst>
               <a:ext uri="{FF2B5EF4-FFF2-40B4-BE49-F238E27FC236}">
-                <a16:creationId xmlns:a16="http://schemas.microsoft.com/office/drawing/2014/main" id="{54BF702D-FAA1-6C98-EA03-DB21846550A6}"/>
+                <a16:creationId xmlns:a16="http://schemas.microsoft.com/office/drawing/2014/main" id="{5E040F43-60A7-C50D-1F5B-F984054F2D7C}"/>
               </a:ext>
             </a:extLst>
           </p:cNvPr>
@@ -8163,7 +8249,7 @@
           <p:cNvPr id="2" name="제목 1">
             <a:extLst>
               <a:ext uri="{FF2B5EF4-FFF2-40B4-BE49-F238E27FC236}">
-                <a16:creationId xmlns:a16="http://schemas.microsoft.com/office/drawing/2014/main" id="{8F1FE8CF-671B-89FF-B68D-5BBADDECF5F9}"/>
+                <a16:creationId xmlns:a16="http://schemas.microsoft.com/office/drawing/2014/main" id="{5FAC57F5-99D7-9C46-B6C1-D16224151FE9}"/>
               </a:ext>
             </a:extLst>
           </p:cNvPr>
@@ -8180,17 +8266,443 @@
           <a:lstStyle/>
           <a:p>
             <a:r>
+              <a:rPr lang="ko-KR" altLang="en-US" dirty="0">
+                <a:solidFill>
+                  <a:srgbClr val="6EC173"/>
+                </a:solidFill>
+              </a:rPr>
+              <a:t>실습</a:t>
+            </a:r>
+            <a:r>
+              <a:rPr lang="en-US" altLang="ko-KR" dirty="0">
+                <a:solidFill>
+                  <a:srgbClr val="6EC173"/>
+                </a:solidFill>
+              </a:rPr>
+              <a:t>.  </a:t>
+            </a:r>
+            <a:r>
               <a:rPr lang="en-US" altLang="ko-KR" dirty="0"/>
-              <a:t>spread vs. rest</a:t>
-            </a:r>
-            <a:endParaRPr lang="ko-KR" altLang="en-US" dirty="0"/>
+              <a:t> Spread</a:t>
+            </a:r>
+            <a:r>
+              <a:rPr lang="ko-KR" altLang="en-US" dirty="0"/>
+              <a:t>연산자 만들기</a:t>
+            </a:r>
+          </a:p>
+        </p:txBody>
+      </p:sp>
+      <p:sp>
+        <p:nvSpPr>
+          <p:cNvPr id="6" name="내용 개체 틀 1">
+            <a:extLst>
+              <a:ext uri="{FF2B5EF4-FFF2-40B4-BE49-F238E27FC236}">
+                <a16:creationId xmlns:a16="http://schemas.microsoft.com/office/drawing/2014/main" id="{70C2BA37-BE91-39C4-AC08-0E8A1052E2F7}"/>
+              </a:ext>
+            </a:extLst>
+          </p:cNvPr>
+          <p:cNvSpPr txBox="1">
+            <a:spLocks/>
+          </p:cNvSpPr>
+          <p:nvPr/>
+        </p:nvSpPr>
+        <p:spPr>
+          <a:xfrm>
+            <a:off x="838200" y="1825625"/>
+            <a:ext cx="10515600" cy="4351338"/>
+          </a:xfrm>
+          <a:prstGeom prst="rect">
+            <a:avLst/>
+          </a:prstGeom>
+        </p:spPr>
+        <p:txBody>
+          <a:bodyPr vert="horz" lIns="91440" tIns="45720" rIns="91440" bIns="45720" rtlCol="0">
+            <a:normAutofit/>
+          </a:bodyPr>
+          <a:lstStyle>
+            <a:lvl1pPr marL="228600" indent="-228600" algn="l" defTabSz="914400" rtl="0" eaLnBrk="1" latinLnBrk="1" hangingPunct="1">
+              <a:lnSpc>
+                <a:spcPct val="90000"/>
+              </a:lnSpc>
+              <a:spcBef>
+                <a:spcPts val="1000"/>
+              </a:spcBef>
+              <a:buFont typeface="Arial" panose="020B0604020202020204" pitchFamily="34" charset="0"/>
+              <a:buChar char="•"/>
+              <a:defRPr sz="2800" kern="1200">
+                <a:solidFill>
+                  <a:schemeClr val="tx1"/>
+                </a:solidFill>
+                <a:latin typeface="+mn-lt"/>
+                <a:ea typeface="+mn-ea"/>
+                <a:cs typeface="+mn-cs"/>
+              </a:defRPr>
+            </a:lvl1pPr>
+            <a:lvl2pPr marL="685800" indent="-228600" algn="l" defTabSz="914400" rtl="0" eaLnBrk="1" latinLnBrk="1" hangingPunct="1">
+              <a:lnSpc>
+                <a:spcPct val="90000"/>
+              </a:lnSpc>
+              <a:spcBef>
+                <a:spcPts val="500"/>
+              </a:spcBef>
+              <a:buFont typeface="Arial" panose="020B0604020202020204" pitchFamily="34" charset="0"/>
+              <a:buChar char="•"/>
+              <a:defRPr sz="2400" kern="1200">
+                <a:solidFill>
+                  <a:schemeClr val="tx1"/>
+                </a:solidFill>
+                <a:latin typeface="+mn-lt"/>
+                <a:ea typeface="+mn-ea"/>
+                <a:cs typeface="+mn-cs"/>
+              </a:defRPr>
+            </a:lvl2pPr>
+            <a:lvl3pPr marL="1143000" indent="-228600" algn="l" defTabSz="914400" rtl="0" eaLnBrk="1" latinLnBrk="1" hangingPunct="1">
+              <a:lnSpc>
+                <a:spcPct val="90000"/>
+              </a:lnSpc>
+              <a:spcBef>
+                <a:spcPts val="500"/>
+              </a:spcBef>
+              <a:buFont typeface="Arial" panose="020B0604020202020204" pitchFamily="34" charset="0"/>
+              <a:buChar char="•"/>
+              <a:defRPr sz="2000" kern="1200">
+                <a:solidFill>
+                  <a:schemeClr val="tx1"/>
+                </a:solidFill>
+                <a:latin typeface="+mn-lt"/>
+                <a:ea typeface="+mn-ea"/>
+                <a:cs typeface="+mn-cs"/>
+              </a:defRPr>
+            </a:lvl3pPr>
+            <a:lvl4pPr marL="1600200" indent="-228600" algn="l" defTabSz="914400" rtl="0" eaLnBrk="1" latinLnBrk="1" hangingPunct="1">
+              <a:lnSpc>
+                <a:spcPct val="90000"/>
+              </a:lnSpc>
+              <a:spcBef>
+                <a:spcPts val="500"/>
+              </a:spcBef>
+              <a:buFont typeface="Arial" panose="020B0604020202020204" pitchFamily="34" charset="0"/>
+              <a:buChar char="•"/>
+              <a:defRPr sz="1800" kern="1200">
+                <a:solidFill>
+                  <a:schemeClr val="tx1"/>
+                </a:solidFill>
+                <a:latin typeface="+mn-lt"/>
+                <a:ea typeface="+mn-ea"/>
+                <a:cs typeface="+mn-cs"/>
+              </a:defRPr>
+            </a:lvl4pPr>
+            <a:lvl5pPr marL="2057400" indent="-228600" algn="l" defTabSz="914400" rtl="0" eaLnBrk="1" latinLnBrk="1" hangingPunct="1">
+              <a:lnSpc>
+                <a:spcPct val="90000"/>
+              </a:lnSpc>
+              <a:spcBef>
+                <a:spcPts val="500"/>
+              </a:spcBef>
+              <a:buFont typeface="Arial" panose="020B0604020202020204" pitchFamily="34" charset="0"/>
+              <a:buChar char="•"/>
+              <a:defRPr sz="1800" kern="1200">
+                <a:solidFill>
+                  <a:schemeClr val="tx1"/>
+                </a:solidFill>
+                <a:latin typeface="+mn-lt"/>
+                <a:ea typeface="+mn-ea"/>
+                <a:cs typeface="+mn-cs"/>
+              </a:defRPr>
+            </a:lvl5pPr>
+            <a:lvl6pPr marL="2514600" indent="-228600" algn="l" defTabSz="914400" rtl="0" eaLnBrk="1" latinLnBrk="1" hangingPunct="1">
+              <a:lnSpc>
+                <a:spcPct val="90000"/>
+              </a:lnSpc>
+              <a:spcBef>
+                <a:spcPts val="500"/>
+              </a:spcBef>
+              <a:buFont typeface="Arial" panose="020B0604020202020204" pitchFamily="34" charset="0"/>
+              <a:buChar char="•"/>
+              <a:defRPr sz="1800" kern="1200">
+                <a:solidFill>
+                  <a:schemeClr val="tx1"/>
+                </a:solidFill>
+                <a:latin typeface="+mn-lt"/>
+                <a:ea typeface="+mn-ea"/>
+                <a:cs typeface="+mn-cs"/>
+              </a:defRPr>
+            </a:lvl6pPr>
+            <a:lvl7pPr marL="2971800" indent="-228600" algn="l" defTabSz="914400" rtl="0" eaLnBrk="1" latinLnBrk="1" hangingPunct="1">
+              <a:lnSpc>
+                <a:spcPct val="90000"/>
+              </a:lnSpc>
+              <a:spcBef>
+                <a:spcPts val="500"/>
+              </a:spcBef>
+              <a:buFont typeface="Arial" panose="020B0604020202020204" pitchFamily="34" charset="0"/>
+              <a:buChar char="•"/>
+              <a:defRPr sz="1800" kern="1200">
+                <a:solidFill>
+                  <a:schemeClr val="tx1"/>
+                </a:solidFill>
+                <a:latin typeface="+mn-lt"/>
+                <a:ea typeface="+mn-ea"/>
+                <a:cs typeface="+mn-cs"/>
+              </a:defRPr>
+            </a:lvl7pPr>
+            <a:lvl8pPr marL="3429000" indent="-228600" algn="l" defTabSz="914400" rtl="0" eaLnBrk="1" latinLnBrk="1" hangingPunct="1">
+              <a:lnSpc>
+                <a:spcPct val="90000"/>
+              </a:lnSpc>
+              <a:spcBef>
+                <a:spcPts val="500"/>
+              </a:spcBef>
+              <a:buFont typeface="Arial" panose="020B0604020202020204" pitchFamily="34" charset="0"/>
+              <a:buChar char="•"/>
+              <a:defRPr sz="1800" kern="1200">
+                <a:solidFill>
+                  <a:schemeClr val="tx1"/>
+                </a:solidFill>
+                <a:latin typeface="+mn-lt"/>
+                <a:ea typeface="+mn-ea"/>
+                <a:cs typeface="+mn-cs"/>
+              </a:defRPr>
+            </a:lvl8pPr>
+            <a:lvl9pPr marL="3886200" indent="-228600" algn="l" defTabSz="914400" rtl="0" eaLnBrk="1" latinLnBrk="1" hangingPunct="1">
+              <a:lnSpc>
+                <a:spcPct val="90000"/>
+              </a:lnSpc>
+              <a:spcBef>
+                <a:spcPts val="500"/>
+              </a:spcBef>
+              <a:buFont typeface="Arial" panose="020B0604020202020204" pitchFamily="34" charset="0"/>
+              <a:buChar char="•"/>
+              <a:defRPr sz="1800" kern="1200">
+                <a:solidFill>
+                  <a:schemeClr val="tx1"/>
+                </a:solidFill>
+                <a:latin typeface="+mn-lt"/>
+                <a:ea typeface="+mn-ea"/>
+                <a:cs typeface="+mn-cs"/>
+              </a:defRPr>
+            </a:lvl9pPr>
+          </a:lstStyle>
+          <a:p>
+            <a:pPr marL="457200" lvl="1" indent="0">
+              <a:buFont typeface="Arial" panose="020B0604020202020204" pitchFamily="34" charset="0"/>
+              <a:buNone/>
+            </a:pPr>
+            <a:endParaRPr lang="en-US" altLang="ko-KR" dirty="0">
+              <a:solidFill>
+                <a:srgbClr val="212529"/>
+              </a:solidFill>
+              <a:latin typeface="+mn-ea"/>
+            </a:endParaRPr>
+          </a:p>
+          <a:p>
+            <a:pPr marL="457200" lvl="1" indent="0">
+              <a:buFont typeface="Arial" panose="020B0604020202020204" pitchFamily="34" charset="0"/>
+              <a:buNone/>
+            </a:pPr>
+            <a:endParaRPr lang="en-US" altLang="ko-KR" dirty="0">
+              <a:solidFill>
+                <a:srgbClr val="212529"/>
+              </a:solidFill>
+              <a:latin typeface="+mn-ea"/>
+            </a:endParaRPr>
+          </a:p>
+          <a:p>
+            <a:r>
+              <a:rPr lang="en-US" altLang="ko-KR" b="1" dirty="0">
+                <a:solidFill>
+                  <a:srgbClr val="212529"/>
+                </a:solidFill>
+                <a:latin typeface="+mn-ea"/>
+              </a:rPr>
+              <a:t>[</a:t>
+            </a:r>
+            <a:r>
+              <a:rPr lang="ko-KR" altLang="en-US" b="1" dirty="0" err="1">
+                <a:solidFill>
+                  <a:srgbClr val="212529"/>
+                </a:solidFill>
+                <a:latin typeface="+mn-ea"/>
+              </a:rPr>
+              <a:t>코딩온</a:t>
+            </a:r>
+            <a:r>
+              <a:rPr lang="en-US" altLang="ko-KR" b="1" dirty="0">
+                <a:solidFill>
+                  <a:srgbClr val="212529"/>
+                </a:solidFill>
+                <a:latin typeface="+mn-ea"/>
+              </a:rPr>
+              <a:t>] Node.js </a:t>
+            </a:r>
+            <a:r>
+              <a:rPr lang="ko-KR" altLang="en-US" b="1" dirty="0">
+                <a:solidFill>
+                  <a:srgbClr val="212529"/>
+                </a:solidFill>
+                <a:latin typeface="+mn-ea"/>
+              </a:rPr>
+              <a:t>실습</a:t>
+            </a:r>
+            <a:r>
+              <a:rPr lang="en-US" altLang="ko-KR" b="1" dirty="0">
+                <a:solidFill>
+                  <a:srgbClr val="212529"/>
+                </a:solidFill>
+                <a:latin typeface="+mn-ea"/>
+              </a:rPr>
+              <a:t> </a:t>
+            </a:r>
+            <a:r>
+              <a:rPr lang="ko-KR" altLang="en-US" dirty="0">
+                <a:solidFill>
+                  <a:srgbClr val="212529"/>
+                </a:solidFill>
+                <a:latin typeface="+mn-ea"/>
+              </a:rPr>
+              <a:t>강의 클릭</a:t>
+            </a:r>
+            <a:br>
+              <a:rPr lang="en-US" altLang="ko-KR" dirty="0">
+                <a:solidFill>
+                  <a:srgbClr val="212529"/>
+                </a:solidFill>
+                <a:latin typeface="+mn-ea"/>
+              </a:rPr>
+            </a:br>
+            <a:endParaRPr lang="en-US" altLang="ko-KR" dirty="0">
+              <a:solidFill>
+                <a:srgbClr val="212529"/>
+              </a:solidFill>
+              <a:latin typeface="+mn-ea"/>
+            </a:endParaRPr>
+          </a:p>
+          <a:p>
+            <a:pPr lvl="1"/>
+            <a:r>
+              <a:rPr lang="ko-KR" altLang="en-US" sz="2800" b="1" dirty="0">
+                <a:solidFill>
+                  <a:srgbClr val="212529"/>
+                </a:solidFill>
+                <a:latin typeface="+mn-ea"/>
+              </a:rPr>
+              <a:t>➡ </a:t>
+            </a:r>
+            <a:r>
+              <a:rPr lang="en-US" altLang="ko-KR" sz="2800" b="1" dirty="0">
+                <a:solidFill>
+                  <a:srgbClr val="212529"/>
+                </a:solidFill>
+                <a:latin typeface="+mn-ea"/>
+              </a:rPr>
+              <a:t>[…</a:t>
+            </a:r>
+            <a:r>
+              <a:rPr lang="ko-KR" altLang="en-US" sz="2800" b="1" dirty="0">
+                <a:solidFill>
+                  <a:srgbClr val="212529"/>
+                </a:solidFill>
+                <a:latin typeface="+mn-ea"/>
+              </a:rPr>
+              <a:t>연산자 실습</a:t>
+            </a:r>
+            <a:r>
+              <a:rPr lang="en-US" altLang="ko-KR" sz="2800" b="1" dirty="0">
+                <a:solidFill>
+                  <a:srgbClr val="212529"/>
+                </a:solidFill>
+                <a:latin typeface="+mn-ea"/>
+              </a:rPr>
+              <a:t>]</a:t>
+            </a:r>
+            <a:r>
+              <a:rPr lang="en-US" altLang="ko-KR" sz="2800" dirty="0">
+                <a:solidFill>
+                  <a:srgbClr val="212529"/>
+                </a:solidFill>
+                <a:latin typeface="+mn-ea"/>
+              </a:rPr>
+              <a:t> </a:t>
+            </a:r>
+            <a:r>
+              <a:rPr lang="ko-KR" altLang="en-US" sz="2800" dirty="0">
+                <a:solidFill>
+                  <a:srgbClr val="212529"/>
+                </a:solidFill>
+                <a:latin typeface="+mn-ea"/>
+              </a:rPr>
+              <a:t>커리큘럼 클릭</a:t>
+            </a:r>
+            <a:endParaRPr lang="en-US" altLang="ko-KR" sz="2800" dirty="0">
+              <a:solidFill>
+                <a:srgbClr val="212529"/>
+              </a:solidFill>
+              <a:latin typeface="+mn-ea"/>
+            </a:endParaRPr>
+          </a:p>
+          <a:p>
+            <a:pPr lvl="1"/>
+            <a:r>
+              <a:rPr lang="ko-KR" altLang="en-US" sz="2800" b="1" dirty="0">
+                <a:solidFill>
+                  <a:srgbClr val="212529"/>
+                </a:solidFill>
+                <a:latin typeface="+mn-ea"/>
+              </a:rPr>
+              <a:t>➡ </a:t>
+            </a:r>
+            <a:r>
+              <a:rPr lang="en-US" altLang="ko-KR" sz="2800" b="1" dirty="0">
+                <a:solidFill>
+                  <a:schemeClr val="accent1"/>
+                </a:solidFill>
+                <a:latin typeface="+mn-ea"/>
+              </a:rPr>
+              <a:t>[Spread </a:t>
+            </a:r>
+            <a:r>
+              <a:rPr lang="ko-KR" altLang="en-US" sz="2800" b="1" dirty="0">
+                <a:solidFill>
+                  <a:schemeClr val="accent1"/>
+                </a:solidFill>
+                <a:latin typeface="+mn-ea"/>
+              </a:rPr>
+              <a:t>연산자 사용하기</a:t>
+            </a:r>
+            <a:r>
+              <a:rPr lang="en-US" altLang="ko-KR" sz="2800" b="1" dirty="0">
+                <a:solidFill>
+                  <a:schemeClr val="accent1"/>
+                </a:solidFill>
+                <a:latin typeface="+mn-ea"/>
+              </a:rPr>
+              <a:t>]</a:t>
+            </a:r>
+            <a:r>
+              <a:rPr lang="en-US" altLang="ko-KR" sz="2800" dirty="0">
+                <a:solidFill>
+                  <a:schemeClr val="accent1"/>
+                </a:solidFill>
+                <a:latin typeface="+mn-ea"/>
+              </a:rPr>
+              <a:t> </a:t>
+            </a:r>
+            <a:r>
+              <a:rPr lang="ko-KR" altLang="en-US" sz="2800" dirty="0">
+                <a:solidFill>
+                  <a:srgbClr val="212529"/>
+                </a:solidFill>
+                <a:latin typeface="+mn-ea"/>
+              </a:rPr>
+              <a:t> 진행</a:t>
+            </a:r>
           </a:p>
         </p:txBody>
       </p:sp>
     </p:spTree>
     <p:extLst>
       <p:ext uri="{BB962C8B-B14F-4D97-AF65-F5344CB8AC3E}">
-        <p14:creationId xmlns:p14="http://schemas.microsoft.com/office/powerpoint/2010/main" val="3950963713"/>
+        <p14:creationId xmlns:p14="http://schemas.microsoft.com/office/powerpoint/2010/main" val="2078636391"/>
       </p:ext>
     </p:extLst>
   </p:cSld>
@@ -10651,10 +11163,10 @@
       </p:grpSpPr>
       <p:sp>
         <p:nvSpPr>
-          <p:cNvPr id="2" name="내용 개체 틀 1">
+          <p:cNvPr id="13" name="내용 개체 틀 2">
             <a:extLst>
               <a:ext uri="{FF2B5EF4-FFF2-40B4-BE49-F238E27FC236}">
-                <a16:creationId xmlns:a16="http://schemas.microsoft.com/office/drawing/2014/main" id="{E0E29F27-C50C-4102-2376-A62C77BF0ABF}"/>
+                <a16:creationId xmlns:a16="http://schemas.microsoft.com/office/drawing/2014/main" id="{847FD532-7F61-A001-537F-B970BD821AF3}"/>
               </a:ext>
             </a:extLst>
           </p:cNvPr>
@@ -10665,138 +11177,37 @@
             <p:ph idx="1"/>
           </p:nvPr>
         </p:nvSpPr>
-        <p:spPr/>
-        <p:txBody>
-          <a:bodyPr/>
+        <p:spPr>
+          <a:xfrm>
+            <a:off x="510988" y="1328391"/>
+            <a:ext cx="11260802" cy="5328442"/>
+          </a:xfrm>
+        </p:spPr>
+        <p:txBody>
+          <a:bodyPr>
+            <a:normAutofit/>
+          </a:bodyPr>
           <a:lstStyle/>
           <a:p>
-            <a:r>
-              <a:rPr lang="en-US" altLang="ko-KR" dirty="0"/>
-              <a:t>Shape(</a:t>
-            </a:r>
-            <a:r>
-              <a:rPr lang="ko-KR" altLang="en-US" dirty="0"/>
-              <a:t>직사각형</a:t>
-            </a:r>
-            <a:r>
-              <a:rPr lang="en-US" altLang="ko-KR" dirty="0"/>
-              <a:t>) </a:t>
-            </a:r>
-            <a:r>
-              <a:rPr lang="ko-KR" altLang="en-US" dirty="0"/>
-              <a:t>클래스의 속성</a:t>
-            </a:r>
-            <a:r>
-              <a:rPr lang="en-US" altLang="ko-KR" dirty="0"/>
-              <a:t>: </a:t>
-            </a:r>
-            <a:r>
-              <a:rPr lang="ko-KR" altLang="en-US" dirty="0"/>
-              <a:t>가로와 세로</a:t>
-            </a:r>
             <a:endParaRPr lang="en-US" altLang="ko-KR" dirty="0"/>
           </a:p>
           <a:p>
-            <a:r>
-              <a:rPr lang="en-US" altLang="ko-KR" dirty="0"/>
-              <a:t>Shape </a:t>
-            </a:r>
-            <a:r>
-              <a:rPr lang="ko-KR" altLang="en-US" dirty="0"/>
-              <a:t>클래스의 메소드 </a:t>
-            </a:r>
-            <a:r>
-              <a:rPr lang="en-US" altLang="ko-KR" dirty="0" err="1"/>
-              <a:t>getArea</a:t>
-            </a:r>
-            <a:r>
-              <a:rPr lang="en-US" altLang="ko-KR" dirty="0"/>
-              <a:t>()</a:t>
-            </a:r>
-          </a:p>
-          <a:p>
-            <a:pPr lvl="1"/>
-            <a:r>
-              <a:rPr lang="ko-KR" altLang="en-US" dirty="0"/>
-              <a:t>넓이 반환하는 메소드</a:t>
-            </a:r>
-            <a:r>
-              <a:rPr lang="en-US" altLang="ko-KR" dirty="0"/>
-              <a:t>(</a:t>
-            </a:r>
-            <a:r>
-              <a:rPr lang="ko-KR" altLang="en-US" dirty="0"/>
-              <a:t>가로 </a:t>
-            </a:r>
-            <a:r>
-              <a:rPr lang="en-US" altLang="ko-KR" dirty="0"/>
-              <a:t>* </a:t>
-            </a:r>
-            <a:r>
-              <a:rPr lang="ko-KR" altLang="en-US" dirty="0"/>
-              <a:t>세로</a:t>
-            </a:r>
-            <a:r>
-              <a:rPr lang="en-US" altLang="ko-KR" dirty="0"/>
-              <a:t>)</a:t>
-            </a:r>
-          </a:p>
-          <a:p>
-            <a:pPr lvl="1"/>
-            <a:endParaRPr lang="en-US" altLang="ko-KR" dirty="0"/>
-          </a:p>
-          <a:p>
-            <a:pPr marL="457200" lvl="1" indent="0">
+            <a:pPr marL="0" indent="0">
               <a:buNone/>
             </a:pPr>
-            <a:r>
-              <a:rPr lang="en-US" altLang="ko-KR" dirty="0"/>
-              <a:t>let rec1 = new Shape(3,4);</a:t>
-            </a:r>
-          </a:p>
-          <a:p>
-            <a:pPr marL="457200" lvl="1" indent="0">
-              <a:buNone/>
-            </a:pPr>
-            <a:r>
-              <a:rPr lang="en-US" altLang="ko-KR" dirty="0"/>
-              <a:t>console.log(rec1.getArea());</a:t>
-            </a:r>
-            <a:r>
-              <a:rPr lang="ko-KR" altLang="en-US" dirty="0"/>
-              <a:t> </a:t>
-            </a:r>
-            <a:r>
-              <a:rPr lang="en-US" altLang="ko-KR" dirty="0">
-                <a:sym typeface="Wingdings" panose="05000000000000000000" pitchFamily="2" charset="2"/>
-              </a:rPr>
-              <a:t> 12 </a:t>
-            </a:r>
-            <a:r>
-              <a:rPr lang="ko-KR" altLang="en-US" dirty="0">
-                <a:sym typeface="Wingdings" panose="05000000000000000000" pitchFamily="2" charset="2"/>
-              </a:rPr>
-              <a:t>가 나오는지 확인</a:t>
-            </a:r>
             <a:endParaRPr lang="en-US" altLang="ko-KR" dirty="0"/>
           </a:p>
           <a:p>
-            <a:pPr marL="457200" lvl="1" indent="0">
-              <a:buNone/>
-            </a:pPr>
-            <a:endParaRPr lang="ko-KR" altLang="en-US" dirty="0"/>
-          </a:p>
-          <a:p>
-            <a:endParaRPr lang="ko-KR" altLang="en-US" dirty="0"/>
-          </a:p>
-        </p:txBody>
-      </p:sp>
-      <p:sp>
-        <p:nvSpPr>
-          <p:cNvPr id="3" name="날짜 개체 틀 2">
+            <a:endParaRPr lang="en-US" altLang="ko-KR" dirty="0"/>
+          </a:p>
+        </p:txBody>
+      </p:sp>
+      <p:sp>
+        <p:nvSpPr>
+          <p:cNvPr id="4" name="날짜 개체 틀 3">
             <a:extLst>
               <a:ext uri="{FF2B5EF4-FFF2-40B4-BE49-F238E27FC236}">
-                <a16:creationId xmlns:a16="http://schemas.microsoft.com/office/drawing/2014/main" id="{4FB7A7A0-5079-142D-EC3D-2D5FB9FBA880}"/>
+                <a16:creationId xmlns:a16="http://schemas.microsoft.com/office/drawing/2014/main" id="{A695DDE5-0A39-A366-4CFE-A283911999CD}"/>
               </a:ext>
             </a:extLst>
           </p:cNvPr>
@@ -10812,9 +11223,9 @@
           <a:bodyPr/>
           <a:lstStyle/>
           <a:p>
-            <a:fld id="{3C9CE3CE-253F-4F9D-BA15-C226C8D8501E}" type="datetime6">
+            <a:fld id="{0F78D9C4-20C1-4B15-A116-16DC77AD9A1E}" type="datetime1">
               <a:rPr lang="ko-KR" altLang="en-US" smtClean="0"/>
-              <a:t>2024년 6월</a:t>
+              <a:t>2024-06-05</a:t>
             </a:fld>
             <a:endParaRPr lang="ko-KR" altLang="en-US"/>
           </a:p>
@@ -10822,10 +11233,10 @@
       </p:sp>
       <p:sp>
         <p:nvSpPr>
-          <p:cNvPr id="4" name="슬라이드 번호 개체 틀 3">
+          <p:cNvPr id="5" name="슬라이드 번호 개체 틀 4">
             <a:extLst>
               <a:ext uri="{FF2B5EF4-FFF2-40B4-BE49-F238E27FC236}">
-                <a16:creationId xmlns:a16="http://schemas.microsoft.com/office/drawing/2014/main" id="{6F5D1E12-8820-67A7-CCC2-D8FA025A216C}"/>
+                <a16:creationId xmlns:a16="http://schemas.microsoft.com/office/drawing/2014/main" id="{5E040F43-60A7-C50D-1F5B-F984054F2D7C}"/>
               </a:ext>
             </a:extLst>
           </p:cNvPr>
@@ -10851,10 +11262,10 @@
       </p:sp>
       <p:sp>
         <p:nvSpPr>
-          <p:cNvPr id="5" name="제목 4">
+          <p:cNvPr id="2" name="제목 1">
             <a:extLst>
               <a:ext uri="{FF2B5EF4-FFF2-40B4-BE49-F238E27FC236}">
-                <a16:creationId xmlns:a16="http://schemas.microsoft.com/office/drawing/2014/main" id="{8A5459F2-E96B-A4BB-5C0A-E4635CC64FA0}"/>
+                <a16:creationId xmlns:a16="http://schemas.microsoft.com/office/drawing/2014/main" id="{5FAC57F5-99D7-9C46-B6C1-D16224151FE9}"/>
               </a:ext>
             </a:extLst>
           </p:cNvPr>
@@ -10873,7 +11284,7 @@
             <a:r>
               <a:rPr lang="ko-KR" altLang="en-US" dirty="0">
                 <a:solidFill>
-                  <a:schemeClr val="accent1"/>
+                  <a:srgbClr val="6EC173"/>
                 </a:solidFill>
               </a:rPr>
               <a:t>실습</a:t>
@@ -10881,18 +11292,425 @@
             <a:r>
               <a:rPr lang="en-US" altLang="ko-KR" dirty="0">
                 <a:solidFill>
-                  <a:schemeClr val="accent1"/>
-                </a:solidFill>
-              </a:rPr>
-              <a:t>. </a:t>
+                  <a:srgbClr val="6EC173"/>
+                </a:solidFill>
+              </a:rPr>
+              <a:t>.  </a:t>
             </a:r>
             <a:r>
               <a:rPr lang="en-US" altLang="ko-KR" dirty="0"/>
-              <a:t>Shape </a:t>
+              <a:t> Shape </a:t>
             </a:r>
             <a:r>
               <a:rPr lang="ko-KR" altLang="en-US" dirty="0"/>
               <a:t>클래스 만들기</a:t>
+            </a:r>
+          </a:p>
+        </p:txBody>
+      </p:sp>
+      <p:sp>
+        <p:nvSpPr>
+          <p:cNvPr id="6" name="내용 개체 틀 1">
+            <a:extLst>
+              <a:ext uri="{FF2B5EF4-FFF2-40B4-BE49-F238E27FC236}">
+                <a16:creationId xmlns:a16="http://schemas.microsoft.com/office/drawing/2014/main" id="{70C2BA37-BE91-39C4-AC08-0E8A1052E2F7}"/>
+              </a:ext>
+            </a:extLst>
+          </p:cNvPr>
+          <p:cNvSpPr txBox="1">
+            <a:spLocks/>
+          </p:cNvSpPr>
+          <p:nvPr/>
+        </p:nvSpPr>
+        <p:spPr>
+          <a:xfrm>
+            <a:off x="838200" y="1825625"/>
+            <a:ext cx="10515600" cy="4351338"/>
+          </a:xfrm>
+          <a:prstGeom prst="rect">
+            <a:avLst/>
+          </a:prstGeom>
+        </p:spPr>
+        <p:txBody>
+          <a:bodyPr vert="horz" lIns="91440" tIns="45720" rIns="91440" bIns="45720" rtlCol="0">
+            <a:normAutofit/>
+          </a:bodyPr>
+          <a:lstStyle>
+            <a:lvl1pPr marL="228600" indent="-228600" algn="l" defTabSz="914400" rtl="0" eaLnBrk="1" latinLnBrk="1" hangingPunct="1">
+              <a:lnSpc>
+                <a:spcPct val="90000"/>
+              </a:lnSpc>
+              <a:spcBef>
+                <a:spcPts val="1000"/>
+              </a:spcBef>
+              <a:buFont typeface="Arial" panose="020B0604020202020204" pitchFamily="34" charset="0"/>
+              <a:buChar char="•"/>
+              <a:defRPr sz="2800" kern="1200">
+                <a:solidFill>
+                  <a:schemeClr val="tx1"/>
+                </a:solidFill>
+                <a:latin typeface="+mn-lt"/>
+                <a:ea typeface="+mn-ea"/>
+                <a:cs typeface="+mn-cs"/>
+              </a:defRPr>
+            </a:lvl1pPr>
+            <a:lvl2pPr marL="685800" indent="-228600" algn="l" defTabSz="914400" rtl="0" eaLnBrk="1" latinLnBrk="1" hangingPunct="1">
+              <a:lnSpc>
+                <a:spcPct val="90000"/>
+              </a:lnSpc>
+              <a:spcBef>
+                <a:spcPts val="500"/>
+              </a:spcBef>
+              <a:buFont typeface="Arial" panose="020B0604020202020204" pitchFamily="34" charset="0"/>
+              <a:buChar char="•"/>
+              <a:defRPr sz="2400" kern="1200">
+                <a:solidFill>
+                  <a:schemeClr val="tx1"/>
+                </a:solidFill>
+                <a:latin typeface="+mn-lt"/>
+                <a:ea typeface="+mn-ea"/>
+                <a:cs typeface="+mn-cs"/>
+              </a:defRPr>
+            </a:lvl2pPr>
+            <a:lvl3pPr marL="1143000" indent="-228600" algn="l" defTabSz="914400" rtl="0" eaLnBrk="1" latinLnBrk="1" hangingPunct="1">
+              <a:lnSpc>
+                <a:spcPct val="90000"/>
+              </a:lnSpc>
+              <a:spcBef>
+                <a:spcPts val="500"/>
+              </a:spcBef>
+              <a:buFont typeface="Arial" panose="020B0604020202020204" pitchFamily="34" charset="0"/>
+              <a:buChar char="•"/>
+              <a:defRPr sz="2000" kern="1200">
+                <a:solidFill>
+                  <a:schemeClr val="tx1"/>
+                </a:solidFill>
+                <a:latin typeface="+mn-lt"/>
+                <a:ea typeface="+mn-ea"/>
+                <a:cs typeface="+mn-cs"/>
+              </a:defRPr>
+            </a:lvl3pPr>
+            <a:lvl4pPr marL="1600200" indent="-228600" algn="l" defTabSz="914400" rtl="0" eaLnBrk="1" latinLnBrk="1" hangingPunct="1">
+              <a:lnSpc>
+                <a:spcPct val="90000"/>
+              </a:lnSpc>
+              <a:spcBef>
+                <a:spcPts val="500"/>
+              </a:spcBef>
+              <a:buFont typeface="Arial" panose="020B0604020202020204" pitchFamily="34" charset="0"/>
+              <a:buChar char="•"/>
+              <a:defRPr sz="1800" kern="1200">
+                <a:solidFill>
+                  <a:schemeClr val="tx1"/>
+                </a:solidFill>
+                <a:latin typeface="+mn-lt"/>
+                <a:ea typeface="+mn-ea"/>
+                <a:cs typeface="+mn-cs"/>
+              </a:defRPr>
+            </a:lvl4pPr>
+            <a:lvl5pPr marL="2057400" indent="-228600" algn="l" defTabSz="914400" rtl="0" eaLnBrk="1" latinLnBrk="1" hangingPunct="1">
+              <a:lnSpc>
+                <a:spcPct val="90000"/>
+              </a:lnSpc>
+              <a:spcBef>
+                <a:spcPts val="500"/>
+              </a:spcBef>
+              <a:buFont typeface="Arial" panose="020B0604020202020204" pitchFamily="34" charset="0"/>
+              <a:buChar char="•"/>
+              <a:defRPr sz="1800" kern="1200">
+                <a:solidFill>
+                  <a:schemeClr val="tx1"/>
+                </a:solidFill>
+                <a:latin typeface="+mn-lt"/>
+                <a:ea typeface="+mn-ea"/>
+                <a:cs typeface="+mn-cs"/>
+              </a:defRPr>
+            </a:lvl5pPr>
+            <a:lvl6pPr marL="2514600" indent="-228600" algn="l" defTabSz="914400" rtl="0" eaLnBrk="1" latinLnBrk="1" hangingPunct="1">
+              <a:lnSpc>
+                <a:spcPct val="90000"/>
+              </a:lnSpc>
+              <a:spcBef>
+                <a:spcPts val="500"/>
+              </a:spcBef>
+              <a:buFont typeface="Arial" panose="020B0604020202020204" pitchFamily="34" charset="0"/>
+              <a:buChar char="•"/>
+              <a:defRPr sz="1800" kern="1200">
+                <a:solidFill>
+                  <a:schemeClr val="tx1"/>
+                </a:solidFill>
+                <a:latin typeface="+mn-lt"/>
+                <a:ea typeface="+mn-ea"/>
+                <a:cs typeface="+mn-cs"/>
+              </a:defRPr>
+            </a:lvl6pPr>
+            <a:lvl7pPr marL="2971800" indent="-228600" algn="l" defTabSz="914400" rtl="0" eaLnBrk="1" latinLnBrk="1" hangingPunct="1">
+              <a:lnSpc>
+                <a:spcPct val="90000"/>
+              </a:lnSpc>
+              <a:spcBef>
+                <a:spcPts val="500"/>
+              </a:spcBef>
+              <a:buFont typeface="Arial" panose="020B0604020202020204" pitchFamily="34" charset="0"/>
+              <a:buChar char="•"/>
+              <a:defRPr sz="1800" kern="1200">
+                <a:solidFill>
+                  <a:schemeClr val="tx1"/>
+                </a:solidFill>
+                <a:latin typeface="+mn-lt"/>
+                <a:ea typeface="+mn-ea"/>
+                <a:cs typeface="+mn-cs"/>
+              </a:defRPr>
+            </a:lvl7pPr>
+            <a:lvl8pPr marL="3429000" indent="-228600" algn="l" defTabSz="914400" rtl="0" eaLnBrk="1" latinLnBrk="1" hangingPunct="1">
+              <a:lnSpc>
+                <a:spcPct val="90000"/>
+              </a:lnSpc>
+              <a:spcBef>
+                <a:spcPts val="500"/>
+              </a:spcBef>
+              <a:buFont typeface="Arial" panose="020B0604020202020204" pitchFamily="34" charset="0"/>
+              <a:buChar char="•"/>
+              <a:defRPr sz="1800" kern="1200">
+                <a:solidFill>
+                  <a:schemeClr val="tx1"/>
+                </a:solidFill>
+                <a:latin typeface="+mn-lt"/>
+                <a:ea typeface="+mn-ea"/>
+                <a:cs typeface="+mn-cs"/>
+              </a:defRPr>
+            </a:lvl8pPr>
+            <a:lvl9pPr marL="3886200" indent="-228600" algn="l" defTabSz="914400" rtl="0" eaLnBrk="1" latinLnBrk="1" hangingPunct="1">
+              <a:lnSpc>
+                <a:spcPct val="90000"/>
+              </a:lnSpc>
+              <a:spcBef>
+                <a:spcPts val="500"/>
+              </a:spcBef>
+              <a:buFont typeface="Arial" panose="020B0604020202020204" pitchFamily="34" charset="0"/>
+              <a:buChar char="•"/>
+              <a:defRPr sz="1800" kern="1200">
+                <a:solidFill>
+                  <a:schemeClr val="tx1"/>
+                </a:solidFill>
+                <a:latin typeface="+mn-lt"/>
+                <a:ea typeface="+mn-ea"/>
+                <a:cs typeface="+mn-cs"/>
+              </a:defRPr>
+            </a:lvl9pPr>
+          </a:lstStyle>
+          <a:p>
+            <a:pPr marL="457200" lvl="1" indent="0">
+              <a:buFont typeface="Arial" panose="020B0604020202020204" pitchFamily="34" charset="0"/>
+              <a:buNone/>
+            </a:pPr>
+            <a:endParaRPr lang="en-US" altLang="ko-KR" dirty="0">
+              <a:solidFill>
+                <a:srgbClr val="212529"/>
+              </a:solidFill>
+              <a:latin typeface="+mn-ea"/>
+            </a:endParaRPr>
+          </a:p>
+          <a:p>
+            <a:pPr marL="457200" lvl="1" indent="0">
+              <a:buFont typeface="Arial" panose="020B0604020202020204" pitchFamily="34" charset="0"/>
+              <a:buNone/>
+            </a:pPr>
+            <a:endParaRPr lang="en-US" altLang="ko-KR" dirty="0">
+              <a:solidFill>
+                <a:srgbClr val="212529"/>
+              </a:solidFill>
+              <a:latin typeface="+mn-ea"/>
+            </a:endParaRPr>
+          </a:p>
+          <a:p>
+            <a:r>
+              <a:rPr lang="en-US" altLang="ko-KR" b="1" dirty="0">
+                <a:solidFill>
+                  <a:srgbClr val="212529"/>
+                </a:solidFill>
+                <a:latin typeface="+mn-ea"/>
+              </a:rPr>
+              <a:t>[</a:t>
+            </a:r>
+            <a:r>
+              <a:rPr lang="ko-KR" altLang="en-US" b="1" dirty="0" err="1">
+                <a:solidFill>
+                  <a:srgbClr val="212529"/>
+                </a:solidFill>
+                <a:latin typeface="+mn-ea"/>
+              </a:rPr>
+              <a:t>코딩온</a:t>
+            </a:r>
+            <a:r>
+              <a:rPr lang="en-US" altLang="ko-KR" b="1" dirty="0">
+                <a:solidFill>
+                  <a:srgbClr val="212529"/>
+                </a:solidFill>
+                <a:latin typeface="+mn-ea"/>
+              </a:rPr>
+              <a:t>] Node.js </a:t>
+            </a:r>
+            <a:r>
+              <a:rPr lang="ko-KR" altLang="en-US" b="1" dirty="0">
+                <a:solidFill>
+                  <a:srgbClr val="212529"/>
+                </a:solidFill>
+                <a:latin typeface="+mn-ea"/>
+              </a:rPr>
+              <a:t>실습</a:t>
+            </a:r>
+            <a:r>
+              <a:rPr lang="en-US" altLang="ko-KR" b="1" dirty="0">
+                <a:solidFill>
+                  <a:srgbClr val="212529"/>
+                </a:solidFill>
+                <a:latin typeface="+mn-ea"/>
+              </a:rPr>
+              <a:t> </a:t>
+            </a:r>
+            <a:r>
+              <a:rPr lang="ko-KR" altLang="en-US" dirty="0">
+                <a:solidFill>
+                  <a:srgbClr val="212529"/>
+                </a:solidFill>
+                <a:latin typeface="+mn-ea"/>
+              </a:rPr>
+              <a:t>강의 클릭</a:t>
+            </a:r>
+            <a:br>
+              <a:rPr lang="en-US" altLang="ko-KR" dirty="0">
+                <a:solidFill>
+                  <a:srgbClr val="212529"/>
+                </a:solidFill>
+                <a:latin typeface="+mn-ea"/>
+              </a:rPr>
+            </a:br>
+            <a:endParaRPr lang="en-US" altLang="ko-KR" dirty="0">
+              <a:solidFill>
+                <a:srgbClr val="212529"/>
+              </a:solidFill>
+              <a:latin typeface="+mn-ea"/>
+            </a:endParaRPr>
+          </a:p>
+          <a:p>
+            <a:pPr lvl="1"/>
+            <a:r>
+              <a:rPr lang="ko-KR" altLang="en-US" sz="2800" b="1" dirty="0">
+                <a:solidFill>
+                  <a:srgbClr val="212529"/>
+                </a:solidFill>
+                <a:latin typeface="+mn-ea"/>
+              </a:rPr>
+              <a:t>➡ </a:t>
+            </a:r>
+            <a:r>
+              <a:rPr lang="en-US" altLang="ko-KR" sz="2800" b="1" dirty="0">
+                <a:solidFill>
+                  <a:srgbClr val="212529"/>
+                </a:solidFill>
+                <a:latin typeface="+mn-ea"/>
+              </a:rPr>
+              <a:t>[</a:t>
+            </a:r>
+            <a:r>
+              <a:rPr lang="ko-KR" altLang="en-US" sz="2800" b="1" dirty="0">
+                <a:solidFill>
+                  <a:srgbClr val="212529"/>
+                </a:solidFill>
+                <a:latin typeface="+mn-ea"/>
+              </a:rPr>
+              <a:t>클래스 실습</a:t>
+            </a:r>
+            <a:r>
+              <a:rPr lang="en-US" altLang="ko-KR" sz="2800" b="1" dirty="0">
+                <a:solidFill>
+                  <a:srgbClr val="212529"/>
+                </a:solidFill>
+                <a:latin typeface="+mn-ea"/>
+              </a:rPr>
+              <a:t>]</a:t>
+            </a:r>
+            <a:r>
+              <a:rPr lang="en-US" altLang="ko-KR" sz="2800" dirty="0">
+                <a:solidFill>
+                  <a:srgbClr val="212529"/>
+                </a:solidFill>
+                <a:latin typeface="+mn-ea"/>
+              </a:rPr>
+              <a:t> </a:t>
+            </a:r>
+            <a:r>
+              <a:rPr lang="ko-KR" altLang="en-US" sz="2800" dirty="0">
+                <a:solidFill>
+                  <a:srgbClr val="212529"/>
+                </a:solidFill>
+                <a:latin typeface="+mn-ea"/>
+              </a:rPr>
+              <a:t>커리큘럼 클릭</a:t>
+            </a:r>
+            <a:endParaRPr lang="en-US" altLang="ko-KR" sz="2800" dirty="0">
+              <a:solidFill>
+                <a:srgbClr val="212529"/>
+              </a:solidFill>
+              <a:latin typeface="+mn-ea"/>
+            </a:endParaRPr>
+          </a:p>
+          <a:p>
+            <a:pPr lvl="1"/>
+            <a:r>
+              <a:rPr lang="ko-KR" altLang="en-US" sz="2800" b="1" dirty="0">
+                <a:solidFill>
+                  <a:srgbClr val="212529"/>
+                </a:solidFill>
+                <a:latin typeface="+mn-ea"/>
+              </a:rPr>
+              <a:t>➡ </a:t>
+            </a:r>
+            <a:r>
+              <a:rPr lang="en-US" altLang="ko-KR" sz="2800" b="1" dirty="0">
+                <a:solidFill>
+                  <a:schemeClr val="accent1"/>
+                </a:solidFill>
+                <a:latin typeface="+mn-ea"/>
+              </a:rPr>
+              <a:t>[Shape </a:t>
+            </a:r>
+            <a:r>
+              <a:rPr lang="ko-KR" altLang="en-US" sz="2800" b="1" dirty="0">
+                <a:solidFill>
+                  <a:schemeClr val="accent1"/>
+                </a:solidFill>
+                <a:latin typeface="+mn-ea"/>
+              </a:rPr>
+              <a:t>클래스 만들기</a:t>
+            </a:r>
+            <a:r>
+              <a:rPr lang="en-US" altLang="ko-KR" sz="2800" b="1" dirty="0">
+                <a:solidFill>
+                  <a:schemeClr val="accent1"/>
+                </a:solidFill>
+                <a:latin typeface="+mn-ea"/>
+              </a:rPr>
+              <a:t>]</a:t>
+            </a:r>
+            <a:r>
+              <a:rPr lang="en-US" altLang="ko-KR" sz="2800" dirty="0">
+                <a:solidFill>
+                  <a:schemeClr val="accent1"/>
+                </a:solidFill>
+                <a:latin typeface="+mn-ea"/>
+              </a:rPr>
+              <a:t> </a:t>
+            </a:r>
+            <a:r>
+              <a:rPr lang="ko-KR" altLang="en-US" sz="2800" dirty="0">
+                <a:solidFill>
+                  <a:srgbClr val="212529"/>
+                </a:solidFill>
+                <a:latin typeface="+mn-ea"/>
+              </a:rPr>
+              <a:t> 진행</a:t>
             </a:r>
           </a:p>
         </p:txBody>
@@ -10900,7 +11718,7 @@
     </p:spTree>
     <p:extLst>
       <p:ext uri="{BB962C8B-B14F-4D97-AF65-F5344CB8AC3E}">
-        <p14:creationId xmlns:p14="http://schemas.microsoft.com/office/powerpoint/2010/main" val="2287051794"/>
+        <p14:creationId xmlns:p14="http://schemas.microsoft.com/office/powerpoint/2010/main" val="259966667"/>
       </p:ext>
     </p:extLst>
   </p:cSld>
@@ -10929,10 +11747,10 @@
       </p:grpSpPr>
       <p:sp>
         <p:nvSpPr>
-          <p:cNvPr id="2" name="내용 개체 틀 1">
+          <p:cNvPr id="13" name="내용 개체 틀 2">
             <a:extLst>
               <a:ext uri="{FF2B5EF4-FFF2-40B4-BE49-F238E27FC236}">
-                <a16:creationId xmlns:a16="http://schemas.microsoft.com/office/drawing/2014/main" id="{E0E29F27-C50C-4102-2376-A62C77BF0ABF}"/>
+                <a16:creationId xmlns:a16="http://schemas.microsoft.com/office/drawing/2014/main" id="{847FD532-7F61-A001-537F-B970BD821AF3}"/>
               </a:ext>
             </a:extLst>
           </p:cNvPr>
@@ -10945,327 +11763,35 @@
         </p:nvSpPr>
         <p:spPr>
           <a:xfrm>
-            <a:off x="838200" y="1480930"/>
-            <a:ext cx="10515600" cy="4696033"/>
+            <a:off x="510988" y="1328391"/>
+            <a:ext cx="11260802" cy="5328442"/>
           </a:xfrm>
         </p:spPr>
         <p:txBody>
           <a:bodyPr>
-            <a:noAutofit/>
+            <a:normAutofit/>
           </a:bodyPr>
           <a:lstStyle/>
           <a:p>
+            <a:endParaRPr lang="en-US" altLang="ko-KR" dirty="0"/>
+          </a:p>
+          <a:p>
             <a:pPr marL="0" indent="0">
-              <a:lnSpc>
-                <a:spcPct val="120000"/>
-              </a:lnSpc>
               <a:buNone/>
             </a:pPr>
-            <a:r>
-              <a:rPr lang="en-US" altLang="ko-KR" sz="2000" dirty="0"/>
-              <a:t>1. Rectangle(</a:t>
-            </a:r>
-            <a:r>
-              <a:rPr lang="ko-KR" altLang="en-US" sz="2000" dirty="0"/>
-              <a:t>직사각형</a:t>
-            </a:r>
-            <a:r>
-              <a:rPr lang="en-US" altLang="ko-KR" sz="2000" dirty="0"/>
-              <a:t>) </a:t>
-            </a:r>
-            <a:r>
-              <a:rPr lang="ko-KR" altLang="en-US" sz="2000" dirty="0" err="1"/>
-              <a:t>클래스만들기</a:t>
-            </a:r>
-            <a:endParaRPr lang="en-US" altLang="ko-KR" sz="2000" dirty="0"/>
-          </a:p>
-          <a:p>
-            <a:pPr lvl="1">
-              <a:lnSpc>
-                <a:spcPct val="120000"/>
-              </a:lnSpc>
-            </a:pPr>
-            <a:r>
-              <a:rPr lang="en-US" altLang="ko-KR" sz="2000" dirty="0"/>
-              <a:t>Shape </a:t>
-            </a:r>
-            <a:r>
-              <a:rPr lang="ko-KR" altLang="en-US" sz="2000" dirty="0"/>
-              <a:t>클래스 상속</a:t>
-            </a:r>
-            <a:endParaRPr lang="en-US" altLang="ko-KR" sz="2000" dirty="0"/>
-          </a:p>
-          <a:p>
-            <a:pPr lvl="1">
-              <a:lnSpc>
-                <a:spcPct val="120000"/>
-              </a:lnSpc>
-            </a:pPr>
-            <a:r>
-              <a:rPr lang="ko-KR" altLang="en-US" sz="2000" dirty="0"/>
-              <a:t>사각형의 넓이 구하는 메소드 </a:t>
-            </a:r>
-            <a:r>
-              <a:rPr lang="en-US" altLang="ko-KR" sz="2000" dirty="0" err="1">
-                <a:solidFill>
-                  <a:schemeClr val="accent3"/>
-                </a:solidFill>
-              </a:rPr>
-              <a:t>getArea</a:t>
-            </a:r>
-            <a:r>
-              <a:rPr lang="en-US" altLang="ko-KR" sz="2000" dirty="0">
-                <a:solidFill>
-                  <a:schemeClr val="accent3"/>
-                </a:solidFill>
-              </a:rPr>
-              <a:t>()</a:t>
-            </a:r>
-          </a:p>
-          <a:p>
-            <a:pPr lvl="1">
-              <a:lnSpc>
-                <a:spcPct val="120000"/>
-              </a:lnSpc>
-            </a:pPr>
-            <a:r>
-              <a:rPr lang="ko-KR" altLang="en-US" sz="2000" dirty="0"/>
-              <a:t>직사각형의 </a:t>
-            </a:r>
-            <a:r>
-              <a:rPr lang="ko-KR" altLang="en-US" sz="2000" dirty="0">
-                <a:solidFill>
-                  <a:srgbClr val="6EC173"/>
-                </a:solidFill>
-              </a:rPr>
-              <a:t>대각선</a:t>
-            </a:r>
-            <a:r>
-              <a:rPr lang="en-US" altLang="ko-KR" sz="2000" dirty="0">
-                <a:solidFill>
-                  <a:srgbClr val="6EC173"/>
-                </a:solidFill>
-              </a:rPr>
-              <a:t> </a:t>
-            </a:r>
-            <a:r>
-              <a:rPr lang="ko-KR" altLang="en-US" sz="2000" dirty="0">
-                <a:solidFill>
-                  <a:srgbClr val="6EC173"/>
-                </a:solidFill>
-              </a:rPr>
-              <a:t>길이 구하는 메소드  추가</a:t>
-            </a:r>
-            <a:br>
-              <a:rPr lang="en-US" altLang="ko-KR" sz="2000" dirty="0">
-                <a:solidFill>
-                  <a:srgbClr val="6EC173"/>
-                </a:solidFill>
-              </a:rPr>
-            </a:br>
-            <a:r>
-              <a:rPr lang="en-US" altLang="ko-KR" sz="2000" dirty="0"/>
-              <a:t>(</a:t>
-            </a:r>
-            <a:r>
-              <a:rPr lang="en-US" altLang="ko-KR" sz="2000" dirty="0" err="1"/>
-              <a:t>Math.sqrt</a:t>
-            </a:r>
-            <a:r>
-              <a:rPr lang="en-US" altLang="ko-KR" sz="2000" dirty="0"/>
-              <a:t>() </a:t>
-            </a:r>
-            <a:r>
-              <a:rPr lang="ko-KR" altLang="en-US" sz="2000" dirty="0"/>
-              <a:t>이용</a:t>
-            </a:r>
-            <a:r>
-              <a:rPr lang="en-US" altLang="ko-KR" sz="2000" dirty="0"/>
-              <a:t>)</a:t>
-            </a:r>
-          </a:p>
-          <a:p>
-            <a:pPr marL="0" indent="0">
-              <a:lnSpc>
-                <a:spcPct val="120000"/>
-              </a:lnSpc>
-              <a:buNone/>
-            </a:pPr>
-            <a:r>
-              <a:rPr lang="en-US" altLang="ko-KR" sz="2000" dirty="0"/>
-              <a:t>2. Triangle(</a:t>
-            </a:r>
-            <a:r>
-              <a:rPr lang="ko-KR" altLang="en-US" sz="2000" dirty="0"/>
-              <a:t>삼각형</a:t>
-            </a:r>
-            <a:r>
-              <a:rPr lang="en-US" altLang="ko-KR" sz="2000" dirty="0"/>
-              <a:t>) </a:t>
-            </a:r>
-            <a:r>
-              <a:rPr lang="ko-KR" altLang="en-US" sz="2000" dirty="0"/>
-              <a:t>클래스 만들기</a:t>
-            </a:r>
-            <a:endParaRPr lang="en-US" altLang="ko-KR" sz="2000" dirty="0"/>
-          </a:p>
-          <a:p>
-            <a:pPr lvl="1">
-              <a:lnSpc>
-                <a:spcPct val="120000"/>
-              </a:lnSpc>
-            </a:pPr>
-            <a:r>
-              <a:rPr lang="ko-KR" altLang="en-US" sz="2000" dirty="0"/>
-              <a:t>넓이 반환하는 메소드 </a:t>
-            </a:r>
-            <a:r>
-              <a:rPr lang="en-US" altLang="ko-KR" sz="2000" dirty="0" err="1">
-                <a:solidFill>
-                  <a:schemeClr val="accent3"/>
-                </a:solidFill>
-              </a:rPr>
-              <a:t>getArea</a:t>
-            </a:r>
-            <a:r>
-              <a:rPr lang="en-US" altLang="ko-KR" sz="2000" dirty="0">
-                <a:solidFill>
-                  <a:schemeClr val="accent3"/>
-                </a:solidFill>
-              </a:rPr>
-              <a:t>() </a:t>
-            </a:r>
-            <a:endParaRPr lang="en-US" altLang="ko-KR" sz="2000" dirty="0"/>
-          </a:p>
-          <a:p>
-            <a:pPr marL="0" indent="0">
-              <a:lnSpc>
-                <a:spcPct val="120000"/>
-              </a:lnSpc>
-              <a:buNone/>
-            </a:pPr>
-            <a:r>
-              <a:rPr lang="en-US" altLang="ko-KR" sz="2000" dirty="0"/>
-              <a:t>3. Circle (</a:t>
-            </a:r>
-            <a:r>
-              <a:rPr lang="ko-KR" altLang="en-US" sz="2000" dirty="0"/>
-              <a:t>원</a:t>
-            </a:r>
-            <a:r>
-              <a:rPr lang="en-US" altLang="ko-KR" sz="2000" dirty="0"/>
-              <a:t>) </a:t>
-            </a:r>
-            <a:r>
-              <a:rPr lang="ko-KR" altLang="en-US" sz="2000" dirty="0"/>
-              <a:t>클래스 만들기</a:t>
-            </a:r>
-            <a:endParaRPr lang="en-US" altLang="ko-KR" sz="2000" dirty="0"/>
-          </a:p>
-          <a:p>
-            <a:pPr lvl="1">
-              <a:lnSpc>
-                <a:spcPct val="120000"/>
-              </a:lnSpc>
-            </a:pPr>
-            <a:r>
-              <a:rPr lang="en-US" altLang="ko-KR" sz="2000" dirty="0"/>
-              <a:t>Shape </a:t>
-            </a:r>
-            <a:r>
-              <a:rPr lang="ko-KR" altLang="en-US" sz="2000" dirty="0"/>
-              <a:t>클래스를 상속</a:t>
-            </a:r>
-            <a:endParaRPr lang="en-US" altLang="ko-KR" sz="2000" dirty="0"/>
-          </a:p>
-          <a:p>
-            <a:pPr lvl="1">
-              <a:lnSpc>
-                <a:spcPct val="120000"/>
-              </a:lnSpc>
-            </a:pPr>
-            <a:r>
-              <a:rPr lang="en-US" altLang="ko-KR" sz="2000" dirty="0"/>
-              <a:t>width, height </a:t>
-            </a:r>
-            <a:r>
-              <a:rPr lang="ko-KR" altLang="en-US" sz="2000" dirty="0"/>
-              <a:t>이외에 </a:t>
-            </a:r>
-            <a:r>
-              <a:rPr lang="en-US" altLang="ko-KR" sz="2000" dirty="0">
-                <a:solidFill>
-                  <a:srgbClr val="6EC173"/>
-                </a:solidFill>
-              </a:rPr>
-              <a:t>radius </a:t>
-            </a:r>
-            <a:r>
-              <a:rPr lang="ko-KR" altLang="en-US" sz="2000" dirty="0">
-                <a:solidFill>
-                  <a:srgbClr val="6EC173"/>
-                </a:solidFill>
-              </a:rPr>
-              <a:t>생성자 추가</a:t>
-            </a:r>
-            <a:endParaRPr lang="en-US" altLang="ko-KR" sz="2000" dirty="0">
-              <a:solidFill>
-                <a:srgbClr val="6EC173"/>
-              </a:solidFill>
-            </a:endParaRPr>
-          </a:p>
-          <a:p>
-            <a:pPr lvl="1">
-              <a:lnSpc>
-                <a:spcPct val="120000"/>
-              </a:lnSpc>
-            </a:pPr>
-            <a:r>
-              <a:rPr lang="en-US" altLang="ko-KR" sz="2000" dirty="0" err="1">
-                <a:solidFill>
-                  <a:schemeClr val="accent3"/>
-                </a:solidFill>
-              </a:rPr>
-              <a:t>getArea</a:t>
-            </a:r>
-            <a:r>
-              <a:rPr lang="en-US" altLang="ko-KR" sz="2000" dirty="0">
-                <a:solidFill>
-                  <a:schemeClr val="accent3"/>
-                </a:solidFill>
-              </a:rPr>
-              <a:t>() </a:t>
-            </a:r>
-            <a:r>
-              <a:rPr lang="ko-KR" altLang="en-US" sz="2000" dirty="0"/>
-              <a:t>메소드는 원의 넓이를 리턴</a:t>
-            </a:r>
-            <a:endParaRPr lang="en-US" altLang="ko-KR" sz="2000" dirty="0"/>
-          </a:p>
-          <a:p>
-            <a:pPr>
-              <a:lnSpc>
-                <a:spcPct val="120000"/>
-              </a:lnSpc>
-            </a:pPr>
-            <a:endParaRPr lang="en-US" altLang="ko-KR" sz="2000" dirty="0"/>
-          </a:p>
-          <a:p>
-            <a:pPr lvl="1">
-              <a:lnSpc>
-                <a:spcPct val="120000"/>
-              </a:lnSpc>
-            </a:pPr>
-            <a:endParaRPr lang="en-US" altLang="ko-KR" sz="2000" dirty="0"/>
-          </a:p>
-        </p:txBody>
-      </p:sp>
-      <p:sp>
-        <p:nvSpPr>
-          <p:cNvPr id="3" name="날짜 개체 틀 2">
+            <a:endParaRPr lang="en-US" altLang="ko-KR" dirty="0"/>
+          </a:p>
+          <a:p>
+            <a:endParaRPr lang="en-US" altLang="ko-KR" dirty="0"/>
+          </a:p>
+        </p:txBody>
+      </p:sp>
+      <p:sp>
+        <p:nvSpPr>
+          <p:cNvPr id="4" name="날짜 개체 틀 3">
             <a:extLst>
               <a:ext uri="{FF2B5EF4-FFF2-40B4-BE49-F238E27FC236}">
-                <a16:creationId xmlns:a16="http://schemas.microsoft.com/office/drawing/2014/main" id="{4FB7A7A0-5079-142D-EC3D-2D5FB9FBA880}"/>
+                <a16:creationId xmlns:a16="http://schemas.microsoft.com/office/drawing/2014/main" id="{A695DDE5-0A39-A366-4CFE-A283911999CD}"/>
               </a:ext>
             </a:extLst>
           </p:cNvPr>
@@ -11281,9 +11807,9 @@
           <a:bodyPr/>
           <a:lstStyle/>
           <a:p>
-            <a:fld id="{3C9CE3CE-253F-4F9D-BA15-C226C8D8501E}" type="datetime6">
+            <a:fld id="{0F78D9C4-20C1-4B15-A116-16DC77AD9A1E}" type="datetime1">
               <a:rPr lang="ko-KR" altLang="en-US" smtClean="0"/>
-              <a:t>2024년 6월</a:t>
+              <a:t>2024-06-05</a:t>
             </a:fld>
             <a:endParaRPr lang="ko-KR" altLang="en-US"/>
           </a:p>
@@ -11291,10 +11817,10 @@
       </p:sp>
       <p:sp>
         <p:nvSpPr>
-          <p:cNvPr id="4" name="슬라이드 번호 개체 틀 3">
+          <p:cNvPr id="5" name="슬라이드 번호 개체 틀 4">
             <a:extLst>
               <a:ext uri="{FF2B5EF4-FFF2-40B4-BE49-F238E27FC236}">
-                <a16:creationId xmlns:a16="http://schemas.microsoft.com/office/drawing/2014/main" id="{6F5D1E12-8820-67A7-CCC2-D8FA025A216C}"/>
+                <a16:creationId xmlns:a16="http://schemas.microsoft.com/office/drawing/2014/main" id="{5E040F43-60A7-C50D-1F5B-F984054F2D7C}"/>
               </a:ext>
             </a:extLst>
           </p:cNvPr>
@@ -11320,10 +11846,10 @@
       </p:sp>
       <p:sp>
         <p:nvSpPr>
-          <p:cNvPr id="5" name="제목 4">
+          <p:cNvPr id="2" name="제목 1">
             <a:extLst>
               <a:ext uri="{FF2B5EF4-FFF2-40B4-BE49-F238E27FC236}">
-                <a16:creationId xmlns:a16="http://schemas.microsoft.com/office/drawing/2014/main" id="{8A5459F2-E96B-A4BB-5C0A-E4635CC64FA0}"/>
+                <a16:creationId xmlns:a16="http://schemas.microsoft.com/office/drawing/2014/main" id="{5FAC57F5-99D7-9C46-B6C1-D16224151FE9}"/>
               </a:ext>
             </a:extLst>
           </p:cNvPr>
@@ -11342,7 +11868,7 @@
             <a:r>
               <a:rPr lang="ko-KR" altLang="en-US" dirty="0">
                 <a:solidFill>
-                  <a:schemeClr val="accent1"/>
+                  <a:srgbClr val="6EC173"/>
                 </a:solidFill>
               </a:rPr>
               <a:t>실습</a:t>
@@ -11350,14 +11876,14 @@
             <a:r>
               <a:rPr lang="en-US" altLang="ko-KR" dirty="0">
                 <a:solidFill>
-                  <a:schemeClr val="accent1"/>
-                </a:solidFill>
-              </a:rPr>
-              <a:t>.</a:t>
+                  <a:srgbClr val="6EC173"/>
+                </a:solidFill>
+              </a:rPr>
+              <a:t>.  </a:t>
             </a:r>
             <a:r>
               <a:rPr lang="en-US" altLang="ko-KR" dirty="0"/>
-              <a:t> </a:t>
+              <a:t>  </a:t>
             </a:r>
             <a:r>
               <a:rPr lang="ko-KR" altLang="en-US" dirty="0"/>
@@ -11381,410 +11907,433 @@
       </p:sp>
       <p:sp>
         <p:nvSpPr>
-          <p:cNvPr id="6" name="TextBox 5">
+          <p:cNvPr id="6" name="내용 개체 틀 1">
             <a:extLst>
               <a:ext uri="{FF2B5EF4-FFF2-40B4-BE49-F238E27FC236}">
-                <a16:creationId xmlns:a16="http://schemas.microsoft.com/office/drawing/2014/main" id="{49ECB6C2-A9FA-7B30-CCA5-9FBD0DA74F1C}"/>
+                <a16:creationId xmlns:a16="http://schemas.microsoft.com/office/drawing/2014/main" id="{70C2BA37-BE91-39C4-AC08-0E8A1052E2F7}"/>
               </a:ext>
             </a:extLst>
           </p:cNvPr>
-          <p:cNvSpPr txBox="1"/>
+          <p:cNvSpPr txBox="1">
+            <a:spLocks/>
+          </p:cNvSpPr>
           <p:nvPr/>
         </p:nvSpPr>
         <p:spPr>
           <a:xfrm>
-            <a:off x="7042328" y="2905616"/>
-            <a:ext cx="3135987" cy="923330"/>
+            <a:off x="838200" y="1825625"/>
+            <a:ext cx="10515600" cy="4351338"/>
           </a:xfrm>
           <a:prstGeom prst="rect">
             <a:avLst/>
           </a:prstGeom>
-          <a:noFill/>
         </p:spPr>
         <p:txBody>
-          <a:bodyPr wrap="none" rtlCol="0">
-            <a:spAutoFit/>
+          <a:bodyPr vert="horz" lIns="91440" tIns="45720" rIns="91440" bIns="45720" rtlCol="0">
+            <a:normAutofit/>
           </a:bodyPr>
-          <a:lstStyle/>
-          <a:p>
-            <a:r>
-              <a:rPr lang="en-US" altLang="ko-KR" dirty="0" err="1">
-                <a:solidFill>
-                  <a:schemeClr val="tx1">
-                    <a:lumMod val="65000"/>
-                    <a:lumOff val="35000"/>
-                  </a:schemeClr>
+          <a:lstStyle>
+            <a:lvl1pPr marL="228600" indent="-228600" algn="l" defTabSz="914400" rtl="0" eaLnBrk="1" latinLnBrk="1" hangingPunct="1">
+              <a:lnSpc>
+                <a:spcPct val="90000"/>
+              </a:lnSpc>
+              <a:spcBef>
+                <a:spcPts val="1000"/>
+              </a:spcBef>
+              <a:buFont typeface="Arial" panose="020B0604020202020204" pitchFamily="34" charset="0"/>
+              <a:buChar char="•"/>
+              <a:defRPr sz="2800" kern="1200">
+                <a:solidFill>
+                  <a:schemeClr val="tx1"/>
+                </a:solidFill>
+                <a:latin typeface="+mn-lt"/>
+                <a:ea typeface="+mn-ea"/>
+                <a:cs typeface="+mn-cs"/>
+              </a:defRPr>
+            </a:lvl1pPr>
+            <a:lvl2pPr marL="685800" indent="-228600" algn="l" defTabSz="914400" rtl="0" eaLnBrk="1" latinLnBrk="1" hangingPunct="1">
+              <a:lnSpc>
+                <a:spcPct val="90000"/>
+              </a:lnSpc>
+              <a:spcBef>
+                <a:spcPts val="500"/>
+              </a:spcBef>
+              <a:buFont typeface="Arial" panose="020B0604020202020204" pitchFamily="34" charset="0"/>
+              <a:buChar char="•"/>
+              <a:defRPr sz="2400" kern="1200">
+                <a:solidFill>
+                  <a:schemeClr val="tx1"/>
+                </a:solidFill>
+                <a:latin typeface="+mn-lt"/>
+                <a:ea typeface="+mn-ea"/>
+                <a:cs typeface="+mn-cs"/>
+              </a:defRPr>
+            </a:lvl2pPr>
+            <a:lvl3pPr marL="1143000" indent="-228600" algn="l" defTabSz="914400" rtl="0" eaLnBrk="1" latinLnBrk="1" hangingPunct="1">
+              <a:lnSpc>
+                <a:spcPct val="90000"/>
+              </a:lnSpc>
+              <a:spcBef>
+                <a:spcPts val="500"/>
+              </a:spcBef>
+              <a:buFont typeface="Arial" panose="020B0604020202020204" pitchFamily="34" charset="0"/>
+              <a:buChar char="•"/>
+              <a:defRPr sz="2000" kern="1200">
+                <a:solidFill>
+                  <a:schemeClr val="tx1"/>
+                </a:solidFill>
+                <a:latin typeface="+mn-lt"/>
+                <a:ea typeface="+mn-ea"/>
+                <a:cs typeface="+mn-cs"/>
+              </a:defRPr>
+            </a:lvl3pPr>
+            <a:lvl4pPr marL="1600200" indent="-228600" algn="l" defTabSz="914400" rtl="0" eaLnBrk="1" latinLnBrk="1" hangingPunct="1">
+              <a:lnSpc>
+                <a:spcPct val="90000"/>
+              </a:lnSpc>
+              <a:spcBef>
+                <a:spcPts val="500"/>
+              </a:spcBef>
+              <a:buFont typeface="Arial" panose="020B0604020202020204" pitchFamily="34" charset="0"/>
+              <a:buChar char="•"/>
+              <a:defRPr sz="1800" kern="1200">
+                <a:solidFill>
+                  <a:schemeClr val="tx1"/>
+                </a:solidFill>
+                <a:latin typeface="+mn-lt"/>
+                <a:ea typeface="+mn-ea"/>
+                <a:cs typeface="+mn-cs"/>
+              </a:defRPr>
+            </a:lvl4pPr>
+            <a:lvl5pPr marL="2057400" indent="-228600" algn="l" defTabSz="914400" rtl="0" eaLnBrk="1" latinLnBrk="1" hangingPunct="1">
+              <a:lnSpc>
+                <a:spcPct val="90000"/>
+              </a:lnSpc>
+              <a:spcBef>
+                <a:spcPts val="500"/>
+              </a:spcBef>
+              <a:buFont typeface="Arial" panose="020B0604020202020204" pitchFamily="34" charset="0"/>
+              <a:buChar char="•"/>
+              <a:defRPr sz="1800" kern="1200">
+                <a:solidFill>
+                  <a:schemeClr val="tx1"/>
+                </a:solidFill>
+                <a:latin typeface="+mn-lt"/>
+                <a:ea typeface="+mn-ea"/>
+                <a:cs typeface="+mn-cs"/>
+              </a:defRPr>
+            </a:lvl5pPr>
+            <a:lvl6pPr marL="2514600" indent="-228600" algn="l" defTabSz="914400" rtl="0" eaLnBrk="1" latinLnBrk="1" hangingPunct="1">
+              <a:lnSpc>
+                <a:spcPct val="90000"/>
+              </a:lnSpc>
+              <a:spcBef>
+                <a:spcPts val="500"/>
+              </a:spcBef>
+              <a:buFont typeface="Arial" panose="020B0604020202020204" pitchFamily="34" charset="0"/>
+              <a:buChar char="•"/>
+              <a:defRPr sz="1800" kern="1200">
+                <a:solidFill>
+                  <a:schemeClr val="tx1"/>
+                </a:solidFill>
+                <a:latin typeface="+mn-lt"/>
+                <a:ea typeface="+mn-ea"/>
+                <a:cs typeface="+mn-cs"/>
+              </a:defRPr>
+            </a:lvl6pPr>
+            <a:lvl7pPr marL="2971800" indent="-228600" algn="l" defTabSz="914400" rtl="0" eaLnBrk="1" latinLnBrk="1" hangingPunct="1">
+              <a:lnSpc>
+                <a:spcPct val="90000"/>
+              </a:lnSpc>
+              <a:spcBef>
+                <a:spcPts val="500"/>
+              </a:spcBef>
+              <a:buFont typeface="Arial" panose="020B0604020202020204" pitchFamily="34" charset="0"/>
+              <a:buChar char="•"/>
+              <a:defRPr sz="1800" kern="1200">
+                <a:solidFill>
+                  <a:schemeClr val="tx1"/>
+                </a:solidFill>
+                <a:latin typeface="+mn-lt"/>
+                <a:ea typeface="+mn-ea"/>
+                <a:cs typeface="+mn-cs"/>
+              </a:defRPr>
+            </a:lvl7pPr>
+            <a:lvl8pPr marL="3429000" indent="-228600" algn="l" defTabSz="914400" rtl="0" eaLnBrk="1" latinLnBrk="1" hangingPunct="1">
+              <a:lnSpc>
+                <a:spcPct val="90000"/>
+              </a:lnSpc>
+              <a:spcBef>
+                <a:spcPts val="500"/>
+              </a:spcBef>
+              <a:buFont typeface="Arial" panose="020B0604020202020204" pitchFamily="34" charset="0"/>
+              <a:buChar char="•"/>
+              <a:defRPr sz="1800" kern="1200">
+                <a:solidFill>
+                  <a:schemeClr val="tx1"/>
+                </a:solidFill>
+                <a:latin typeface="+mn-lt"/>
+                <a:ea typeface="+mn-ea"/>
+                <a:cs typeface="+mn-cs"/>
+              </a:defRPr>
+            </a:lvl8pPr>
+            <a:lvl9pPr marL="3886200" indent="-228600" algn="l" defTabSz="914400" rtl="0" eaLnBrk="1" latinLnBrk="1" hangingPunct="1">
+              <a:lnSpc>
+                <a:spcPct val="90000"/>
+              </a:lnSpc>
+              <a:spcBef>
+                <a:spcPts val="500"/>
+              </a:spcBef>
+              <a:buFont typeface="Arial" panose="020B0604020202020204" pitchFamily="34" charset="0"/>
+              <a:buChar char="•"/>
+              <a:defRPr sz="1800" kern="1200">
+                <a:solidFill>
+                  <a:schemeClr val="tx1"/>
+                </a:solidFill>
+                <a:latin typeface="+mn-lt"/>
+                <a:ea typeface="+mn-ea"/>
+                <a:cs typeface="+mn-cs"/>
+              </a:defRPr>
+            </a:lvl9pPr>
+          </a:lstStyle>
+          <a:p>
+            <a:pPr marL="457200" lvl="1" indent="0">
+              <a:buFont typeface="Arial" panose="020B0604020202020204" pitchFamily="34" charset="0"/>
+              <a:buNone/>
+            </a:pPr>
+            <a:endParaRPr lang="en-US" altLang="ko-KR" dirty="0">
+              <a:solidFill>
+                <a:srgbClr val="212529"/>
+              </a:solidFill>
+              <a:latin typeface="+mn-ea"/>
+            </a:endParaRPr>
+          </a:p>
+          <a:p>
+            <a:pPr marL="457200" lvl="1" indent="0">
+              <a:buFont typeface="Arial" panose="020B0604020202020204" pitchFamily="34" charset="0"/>
+              <a:buNone/>
+            </a:pPr>
+            <a:endParaRPr lang="en-US" altLang="ko-KR" dirty="0">
+              <a:solidFill>
+                <a:srgbClr val="212529"/>
+              </a:solidFill>
+              <a:latin typeface="+mn-ea"/>
+            </a:endParaRPr>
+          </a:p>
+          <a:p>
+            <a:r>
+              <a:rPr lang="en-US" altLang="ko-KR" b="1" dirty="0">
+                <a:solidFill>
+                  <a:srgbClr val="212529"/>
                 </a:solidFill>
                 <a:latin typeface="+mn-ea"/>
               </a:rPr>
-              <a:t>Math.sqrt</a:t>
-            </a:r>
-            <a:r>
+              <a:t>[</a:t>
+            </a:r>
+            <a:r>
+              <a:rPr lang="ko-KR" altLang="en-US" b="1" dirty="0" err="1">
+                <a:solidFill>
+                  <a:srgbClr val="212529"/>
+                </a:solidFill>
+                <a:latin typeface="+mn-ea"/>
+              </a:rPr>
+              <a:t>코딩온</a:t>
+            </a:r>
+            <a:r>
+              <a:rPr lang="en-US" altLang="ko-KR" b="1" dirty="0">
+                <a:solidFill>
+                  <a:srgbClr val="212529"/>
+                </a:solidFill>
+                <a:latin typeface="+mn-ea"/>
+              </a:rPr>
+              <a:t>] Node.js </a:t>
+            </a:r>
+            <a:r>
+              <a:rPr lang="ko-KR" altLang="en-US" b="1" dirty="0">
+                <a:solidFill>
+                  <a:srgbClr val="212529"/>
+                </a:solidFill>
+                <a:latin typeface="+mn-ea"/>
+              </a:rPr>
+              <a:t>실습</a:t>
+            </a:r>
+            <a:r>
+              <a:rPr lang="en-US" altLang="ko-KR" b="1" dirty="0">
+                <a:solidFill>
+                  <a:srgbClr val="212529"/>
+                </a:solidFill>
+                <a:latin typeface="+mn-ea"/>
+              </a:rPr>
+              <a:t> </a:t>
+            </a:r>
+            <a:r>
+              <a:rPr lang="ko-KR" altLang="en-US" dirty="0">
+                <a:solidFill>
+                  <a:srgbClr val="212529"/>
+                </a:solidFill>
+                <a:latin typeface="+mn-ea"/>
+              </a:rPr>
+              <a:t>강의 클릭</a:t>
+            </a:r>
+            <a:br>
               <a:rPr lang="en-US" altLang="ko-KR" dirty="0">
                 <a:solidFill>
-                  <a:schemeClr val="tx1">
-                    <a:lumMod val="65000"/>
-                    <a:lumOff val="35000"/>
-                  </a:schemeClr>
+                  <a:srgbClr val="212529"/>
                 </a:solidFill>
                 <a:latin typeface="+mn-ea"/>
               </a:rPr>
-              <a:t>(n**2) == n</a:t>
-            </a:r>
-            <a:r>
-              <a:rPr lang="ko-KR" altLang="en-US" dirty="0">
-                <a:solidFill>
-                  <a:schemeClr val="tx1">
-                    <a:lumMod val="65000"/>
-                    <a:lumOff val="35000"/>
-                  </a:schemeClr>
+            </a:br>
+            <a:endParaRPr lang="en-US" altLang="ko-KR" dirty="0">
+              <a:solidFill>
+                <a:srgbClr val="212529"/>
+              </a:solidFill>
+              <a:latin typeface="+mn-ea"/>
+            </a:endParaRPr>
+          </a:p>
+          <a:p>
+            <a:pPr lvl="1"/>
+            <a:r>
+              <a:rPr lang="ko-KR" altLang="en-US" sz="2800" b="1" dirty="0">
+                <a:solidFill>
+                  <a:srgbClr val="212529"/>
                 </a:solidFill>
                 <a:latin typeface="+mn-ea"/>
               </a:rPr>
-              <a:t>입니다</a:t>
-            </a:r>
-            <a:r>
-              <a:rPr lang="en-US" altLang="ko-KR" dirty="0">
-                <a:solidFill>
-                  <a:schemeClr val="tx1">
-                    <a:lumMod val="65000"/>
-                    <a:lumOff val="35000"/>
-                  </a:schemeClr>
+              <a:t>➡ </a:t>
+            </a:r>
+            <a:r>
+              <a:rPr lang="en-US" altLang="ko-KR" sz="2800" b="1" dirty="0">
+                <a:solidFill>
+                  <a:srgbClr val="212529"/>
                 </a:solidFill>
                 <a:latin typeface="+mn-ea"/>
               </a:rPr>
-              <a:t>.</a:t>
-            </a:r>
-          </a:p>
-          <a:p>
-            <a:r>
-              <a:rPr lang="en-US" altLang="ko-KR" dirty="0" err="1">
-                <a:solidFill>
-                  <a:schemeClr val="tx1">
-                    <a:lumMod val="65000"/>
-                    <a:lumOff val="35000"/>
-                  </a:schemeClr>
+              <a:t>[</a:t>
+            </a:r>
+            <a:r>
+              <a:rPr lang="ko-KR" altLang="en-US" sz="2800" b="1" dirty="0">
+                <a:solidFill>
+                  <a:srgbClr val="212529"/>
                 </a:solidFill>
                 <a:latin typeface="+mn-ea"/>
               </a:rPr>
-              <a:t>Math.sqrt</a:t>
-            </a:r>
-            <a:r>
-              <a:rPr lang="en-US" altLang="ko-KR" dirty="0">
-                <a:solidFill>
-                  <a:schemeClr val="tx1">
-                    <a:lumMod val="65000"/>
-                    <a:lumOff val="35000"/>
-                  </a:schemeClr>
+              <a:t>클래스 실습</a:t>
+            </a:r>
+            <a:r>
+              <a:rPr lang="en-US" altLang="ko-KR" sz="2800" b="1" dirty="0">
+                <a:solidFill>
+                  <a:srgbClr val="212529"/>
                 </a:solidFill>
                 <a:latin typeface="+mn-ea"/>
               </a:rPr>
-              <a:t>(9)==3</a:t>
-            </a:r>
-          </a:p>
-          <a:p>
-            <a:r>
-              <a:rPr lang="ko-KR" altLang="en-US" dirty="0">
-                <a:solidFill>
-                  <a:schemeClr val="tx1">
-                    <a:lumMod val="65000"/>
-                    <a:lumOff val="35000"/>
-                  </a:schemeClr>
+              <a:t>]</a:t>
+            </a:r>
+            <a:r>
+              <a:rPr lang="en-US" altLang="ko-KR" sz="2800" dirty="0">
+                <a:solidFill>
+                  <a:srgbClr val="212529"/>
                 </a:solidFill>
                 <a:latin typeface="+mn-ea"/>
               </a:rPr>
-              <a:t>제곱근 구하는 함수</a:t>
-            </a:r>
-          </a:p>
-        </p:txBody>
-      </p:sp>
-      <p:sp>
-        <p:nvSpPr>
-          <p:cNvPr id="7" name="오른쪽 화살표 4">
-            <a:extLst>
-              <a:ext uri="{FF2B5EF4-FFF2-40B4-BE49-F238E27FC236}">
-                <a16:creationId xmlns:a16="http://schemas.microsoft.com/office/drawing/2014/main" id="{C5D7CC10-9E64-0EEF-CA82-4849A8F22F32}"/>
-              </a:ext>
-            </a:extLst>
-          </p:cNvPr>
-          <p:cNvSpPr/>
-          <p:nvPr/>
-        </p:nvSpPr>
-        <p:spPr>
-          <a:xfrm>
-            <a:off x="3995200" y="3334839"/>
-            <a:ext cx="2793226" cy="94161"/>
-          </a:xfrm>
-          <a:prstGeom prst="rightArrow">
-            <a:avLst/>
-          </a:prstGeom>
-          <a:solidFill>
-            <a:schemeClr val="accent1"/>
-          </a:solidFill>
-          <a:ln>
-            <a:noFill/>
-          </a:ln>
-        </p:spPr>
-        <p:style>
-          <a:lnRef idx="2">
-            <a:schemeClr val="accent1">
-              <a:shade val="50000"/>
-            </a:schemeClr>
-          </a:lnRef>
-          <a:fillRef idx="1">
-            <a:schemeClr val="accent1"/>
-          </a:fillRef>
-          <a:effectRef idx="0">
-            <a:schemeClr val="accent1"/>
-          </a:effectRef>
-          <a:fontRef idx="minor">
-            <a:schemeClr val="lt1"/>
-          </a:fontRef>
-        </p:style>
-        <p:txBody>
-          <a:bodyPr rtlCol="0" anchor="ctr"/>
-          <a:lstStyle/>
-          <a:p>
-            <a:pPr algn="ctr"/>
-            <a:endParaRPr lang="ko-KR" altLang="en-US">
+              <a:t> </a:t>
+            </a:r>
+            <a:r>
+              <a:rPr lang="ko-KR" altLang="en-US" sz="2800" dirty="0">
+                <a:solidFill>
+                  <a:srgbClr val="212529"/>
+                </a:solidFill>
+                <a:latin typeface="+mn-ea"/>
+              </a:rPr>
+              <a:t>커리큘럼 클릭</a:t>
+            </a:r>
+            <a:endParaRPr lang="en-US" altLang="ko-KR" sz="2800" dirty="0">
               <a:solidFill>
-                <a:srgbClr val="FF5050"/>
+                <a:srgbClr val="212529"/>
               </a:solidFill>
+              <a:latin typeface="+mn-ea"/>
             </a:endParaRPr>
+          </a:p>
+          <a:p>
+            <a:pPr lvl="1"/>
+            <a:r>
+              <a:rPr lang="ko-KR" altLang="en-US" sz="2800" b="1" dirty="0">
+                <a:solidFill>
+                  <a:srgbClr val="212529"/>
+                </a:solidFill>
+                <a:latin typeface="+mn-ea"/>
+              </a:rPr>
+              <a:t>➡ </a:t>
+            </a:r>
+            <a:r>
+              <a:rPr lang="en-US" altLang="ko-KR" sz="2800" b="1" dirty="0">
+                <a:solidFill>
+                  <a:schemeClr val="accent1"/>
+                </a:solidFill>
+                <a:latin typeface="+mn-ea"/>
+              </a:rPr>
+              <a:t>[</a:t>
+            </a:r>
+            <a:r>
+              <a:rPr lang="ko-KR" altLang="en-US" sz="2800" b="1" dirty="0">
+                <a:solidFill>
+                  <a:schemeClr val="accent1"/>
+                </a:solidFill>
+                <a:latin typeface="+mn-ea"/>
+              </a:rPr>
+              <a:t>클래스 상속</a:t>
+            </a:r>
+            <a:r>
+              <a:rPr lang="en-US" altLang="ko-KR" sz="2800" b="1" dirty="0">
+                <a:solidFill>
+                  <a:schemeClr val="accent1"/>
+                </a:solidFill>
+                <a:latin typeface="+mn-ea"/>
+              </a:rPr>
+              <a:t> (</a:t>
+            </a:r>
+            <a:r>
+              <a:rPr lang="ko-KR" altLang="en-US" sz="2800" b="1" dirty="0">
+                <a:solidFill>
+                  <a:schemeClr val="accent1"/>
+                </a:solidFill>
+                <a:latin typeface="+mn-ea"/>
+              </a:rPr>
+              <a:t>선택</a:t>
+            </a:r>
+            <a:r>
+              <a:rPr lang="en-US" altLang="ko-KR" sz="2800" b="1" dirty="0">
+                <a:solidFill>
+                  <a:schemeClr val="accent1"/>
+                </a:solidFill>
+                <a:latin typeface="+mn-ea"/>
+              </a:rPr>
+              <a:t>)]</a:t>
+            </a:r>
+            <a:r>
+              <a:rPr lang="en-US" altLang="ko-KR" sz="2800" dirty="0">
+                <a:solidFill>
+                  <a:schemeClr val="accent1"/>
+                </a:solidFill>
+                <a:latin typeface="+mn-ea"/>
+              </a:rPr>
+              <a:t> </a:t>
+            </a:r>
+            <a:r>
+              <a:rPr lang="ko-KR" altLang="en-US" sz="2800" dirty="0">
+                <a:solidFill>
+                  <a:srgbClr val="212529"/>
+                </a:solidFill>
+                <a:latin typeface="+mn-ea"/>
+              </a:rPr>
+              <a:t> 진행</a:t>
+            </a:r>
           </a:p>
         </p:txBody>
       </p:sp>
     </p:spTree>
     <p:extLst>
       <p:ext uri="{BB962C8B-B14F-4D97-AF65-F5344CB8AC3E}">
-        <p14:creationId xmlns:p14="http://schemas.microsoft.com/office/powerpoint/2010/main" val="811544028"/>
-      </p:ext>
-    </p:extLst>
-  </p:cSld>
-  <p:clrMapOvr>
-    <a:masterClrMapping/>
-  </p:clrMapOvr>
-</p:sld>
-</file>
-
-<file path=ppt/slides/slide25.xml><?xml version="1.0" encoding="utf-8"?>
-<p:sld xmlns:a="http://schemas.openxmlformats.org/drawingml/2006/main" xmlns:r="http://schemas.openxmlformats.org/officeDocument/2006/relationships" xmlns:p="http://schemas.openxmlformats.org/presentationml/2006/main">
-  <p:cSld>
-    <p:spTree>
-      <p:nvGrpSpPr>
-        <p:cNvPr id="1" name=""/>
-        <p:cNvGrpSpPr/>
-        <p:nvPr/>
-      </p:nvGrpSpPr>
-      <p:grpSpPr>
-        <a:xfrm>
-          <a:off x="0" y="0"/>
-          <a:ext cx="0" cy="0"/>
-          <a:chOff x="0" y="0"/>
-          <a:chExt cx="0" cy="0"/>
-        </a:xfrm>
-      </p:grpSpPr>
-      <p:sp>
-        <p:nvSpPr>
-          <p:cNvPr id="2" name="내용 개체 틀 1">
-            <a:extLst>
-              <a:ext uri="{FF2B5EF4-FFF2-40B4-BE49-F238E27FC236}">
-                <a16:creationId xmlns:a16="http://schemas.microsoft.com/office/drawing/2014/main" id="{72EF4DB7-F61F-F4DD-9E9B-1EFEBE1A546B}"/>
-              </a:ext>
-            </a:extLst>
-          </p:cNvPr>
-          <p:cNvSpPr>
-            <a:spLocks noGrp="1"/>
-          </p:cNvSpPr>
-          <p:nvPr>
-            <p:ph idx="1"/>
-          </p:nvPr>
-        </p:nvSpPr>
-        <p:spPr/>
-        <p:txBody>
-          <a:bodyPr/>
-          <a:lstStyle/>
-          <a:p>
-            <a:r>
-              <a:rPr lang="en-US" altLang="ko-KR" dirty="0"/>
-              <a:t>Shape</a:t>
-            </a:r>
-            <a:r>
-              <a:rPr lang="ko-KR" altLang="en-US" dirty="0"/>
-              <a:t>를 상속받은 각각의 클래스 </a:t>
-            </a:r>
-            <a:r>
-              <a:rPr lang="en-US" altLang="ko-KR" dirty="0" err="1"/>
-              <a:t>Rectangel</a:t>
-            </a:r>
-            <a:r>
-              <a:rPr lang="en-US" altLang="ko-KR" dirty="0"/>
-              <a:t>, Triangle, Circle </a:t>
-            </a:r>
-            <a:r>
-              <a:rPr lang="ko-KR" altLang="en-US" dirty="0"/>
-              <a:t>클래스를 이용해서 인스턴스 하나씩 생성</a:t>
-            </a:r>
-            <a:endParaRPr lang="en-US" altLang="ko-KR" dirty="0"/>
-          </a:p>
-          <a:p>
-            <a:r>
-              <a:rPr lang="en-US" altLang="ko-KR" dirty="0" err="1"/>
-              <a:t>getArea</a:t>
-            </a:r>
-            <a:r>
-              <a:rPr lang="ko-KR" altLang="en-US" dirty="0"/>
-              <a:t>로 사각형</a:t>
-            </a:r>
-            <a:r>
-              <a:rPr lang="en-US" altLang="ko-KR" dirty="0"/>
-              <a:t>, </a:t>
-            </a:r>
-            <a:r>
-              <a:rPr lang="ko-KR" altLang="en-US" dirty="0"/>
-              <a:t>삼각형</a:t>
-            </a:r>
-            <a:r>
-              <a:rPr lang="en-US" altLang="ko-KR" dirty="0"/>
-              <a:t>, </a:t>
-            </a:r>
-            <a:r>
-              <a:rPr lang="ko-KR" altLang="en-US" dirty="0"/>
-              <a:t>원의 넓이가 잘 나오는지 확인하기</a:t>
-            </a:r>
-            <a:endParaRPr lang="en-US" altLang="ko-KR" dirty="0"/>
-          </a:p>
-          <a:p>
-            <a:endParaRPr lang="en-US" altLang="ko-KR" dirty="0"/>
-          </a:p>
-          <a:p>
-            <a:endParaRPr lang="ko-KR" altLang="en-US" dirty="0"/>
-          </a:p>
-        </p:txBody>
-      </p:sp>
-      <p:sp>
-        <p:nvSpPr>
-          <p:cNvPr id="3" name="날짜 개체 틀 2">
-            <a:extLst>
-              <a:ext uri="{FF2B5EF4-FFF2-40B4-BE49-F238E27FC236}">
-                <a16:creationId xmlns:a16="http://schemas.microsoft.com/office/drawing/2014/main" id="{682AC41A-4CE8-C27C-0195-4060D729FCE5}"/>
-              </a:ext>
-            </a:extLst>
-          </p:cNvPr>
-          <p:cNvSpPr>
-            <a:spLocks noGrp="1"/>
-          </p:cNvSpPr>
-          <p:nvPr>
-            <p:ph type="dt" sz="half" idx="10"/>
-          </p:nvPr>
-        </p:nvSpPr>
-        <p:spPr/>
-        <p:txBody>
-          <a:bodyPr/>
-          <a:lstStyle/>
-          <a:p>
-            <a:fld id="{3C9CE3CE-253F-4F9D-BA15-C226C8D8501E}" type="datetime6">
-              <a:rPr lang="ko-KR" altLang="en-US" smtClean="0"/>
-              <a:t>2024년 6월</a:t>
-            </a:fld>
-            <a:endParaRPr lang="ko-KR" altLang="en-US"/>
-          </a:p>
-        </p:txBody>
-      </p:sp>
-      <p:sp>
-        <p:nvSpPr>
-          <p:cNvPr id="4" name="슬라이드 번호 개체 틀 3">
-            <a:extLst>
-              <a:ext uri="{FF2B5EF4-FFF2-40B4-BE49-F238E27FC236}">
-                <a16:creationId xmlns:a16="http://schemas.microsoft.com/office/drawing/2014/main" id="{6CCEAE24-7304-66CB-A65B-21F99272E162}"/>
-              </a:ext>
-            </a:extLst>
-          </p:cNvPr>
-          <p:cNvSpPr>
-            <a:spLocks noGrp="1"/>
-          </p:cNvSpPr>
-          <p:nvPr>
-            <p:ph type="sldNum" sz="quarter" idx="12"/>
-          </p:nvPr>
-        </p:nvSpPr>
-        <p:spPr/>
-        <p:txBody>
-          <a:bodyPr/>
-          <a:lstStyle/>
-          <a:p>
-            <a:fld id="{083A2CE0-18CD-4102-B738-4ACFF9E68BA4}" type="slidenum">
-              <a:rPr lang="ko-KR" altLang="en-US" smtClean="0"/>
-              <a:t>25</a:t>
-            </a:fld>
-            <a:endParaRPr lang="ko-KR" altLang="en-US"/>
-          </a:p>
-        </p:txBody>
-      </p:sp>
-      <p:sp>
-        <p:nvSpPr>
-          <p:cNvPr id="5" name="제목 4">
-            <a:extLst>
-              <a:ext uri="{FF2B5EF4-FFF2-40B4-BE49-F238E27FC236}">
-                <a16:creationId xmlns:a16="http://schemas.microsoft.com/office/drawing/2014/main" id="{E36FD935-9E73-CDD4-3BDA-E1D84B74BEB4}"/>
-              </a:ext>
-            </a:extLst>
-          </p:cNvPr>
-          <p:cNvSpPr>
-            <a:spLocks noGrp="1"/>
-          </p:cNvSpPr>
-          <p:nvPr>
-            <p:ph type="title"/>
-          </p:nvPr>
-        </p:nvSpPr>
-        <p:spPr/>
-        <p:txBody>
-          <a:bodyPr/>
-          <a:lstStyle/>
-          <a:p>
-            <a:r>
-              <a:rPr lang="ko-KR" altLang="en-US" dirty="0">
-                <a:solidFill>
-                  <a:schemeClr val="accent1"/>
-                </a:solidFill>
-              </a:rPr>
-              <a:t>실습</a:t>
-            </a:r>
-            <a:r>
-              <a:rPr lang="en-US" altLang="ko-KR" dirty="0">
-                <a:solidFill>
-                  <a:schemeClr val="accent1"/>
-                </a:solidFill>
-              </a:rPr>
-              <a:t>.</a:t>
-            </a:r>
-            <a:r>
-              <a:rPr lang="en-US" altLang="ko-KR" dirty="0"/>
-              <a:t> </a:t>
-            </a:r>
-            <a:r>
-              <a:rPr lang="ko-KR" altLang="en-US" dirty="0"/>
-              <a:t>클래스 상속 </a:t>
-            </a:r>
-            <a:r>
-              <a:rPr lang="en-US" altLang="ko-KR" dirty="0"/>
-              <a:t>(</a:t>
-            </a:r>
-            <a:r>
-              <a:rPr lang="ko-KR" altLang="en-US" dirty="0"/>
-              <a:t>선택</a:t>
-            </a:r>
-            <a:r>
-              <a:rPr lang="en-US" altLang="ko-KR" dirty="0"/>
-              <a:t>)</a:t>
-            </a:r>
-            <a:endParaRPr lang="ko-KR" altLang="en-US" dirty="0"/>
-          </a:p>
-        </p:txBody>
-      </p:sp>
-    </p:spTree>
-    <p:extLst>
-      <p:ext uri="{BB962C8B-B14F-4D97-AF65-F5344CB8AC3E}">
-        <p14:creationId xmlns:p14="http://schemas.microsoft.com/office/powerpoint/2010/main" val="2056707077"/>
+        <p14:creationId xmlns:p14="http://schemas.microsoft.com/office/powerpoint/2010/main" val="1133862684"/>
       </p:ext>
     </p:extLst>
   </p:cSld>
@@ -11954,7 +12503,7 @@
           <a:p>
             <a:fld id="{0F78D9C4-20C1-4B15-A116-16DC77AD9A1E}" type="datetime1">
               <a:rPr lang="ko-KR" altLang="en-US" smtClean="0"/>
-              <a:t>2024-06-04</a:t>
+              <a:t>2024-06-05</a:t>
             </a:fld>
             <a:endParaRPr lang="ko-KR" altLang="en-US"/>
           </a:p>
@@ -13574,7 +14123,7 @@
           <a:p>
             <a:fld id="{0F78D9C4-20C1-4B15-A116-16DC77AD9A1E}" type="datetime1">
               <a:rPr lang="ko-KR" altLang="en-US" smtClean="0"/>
-              <a:t>2024-06-04</a:t>
+              <a:t>2024-06-05</a:t>
             </a:fld>
             <a:endParaRPr lang="ko-KR" altLang="en-US"/>
           </a:p>
@@ -13690,7 +14239,7 @@
           <a:p>
             <a:fld id="{0F78D9C4-20C1-4B15-A116-16DC77AD9A1E}" type="datetime1">
               <a:rPr lang="ko-KR" altLang="en-US" smtClean="0"/>
-              <a:t>2024-06-04</a:t>
+              <a:t>2024-06-05</a:t>
             </a:fld>
             <a:endParaRPr lang="ko-KR" altLang="en-US"/>
           </a:p>
@@ -15163,7 +15712,7 @@
           <a:p>
             <a:fld id="{0F78D9C4-20C1-4B15-A116-16DC77AD9A1E}" type="datetime1">
               <a:rPr lang="ko-KR" altLang="en-US" smtClean="0"/>
-              <a:t>2024-06-04</a:t>
+              <a:t>2024-06-05</a:t>
             </a:fld>
             <a:endParaRPr lang="ko-KR" altLang="en-US"/>
           </a:p>
@@ -15279,7 +15828,7 @@
           <a:p>
             <a:fld id="{0F78D9C4-20C1-4B15-A116-16DC77AD9A1E}" type="datetime1">
               <a:rPr lang="ko-KR" altLang="en-US" smtClean="0"/>
-              <a:t>2024-06-04</a:t>
+              <a:t>2024-06-05</a:t>
             </a:fld>
             <a:endParaRPr lang="ko-KR" altLang="en-US"/>
           </a:p>

--- a/material/[SeSAC_YDP_6] 09_Javascript_고급.pptx
+++ b/material/[SeSAC_YDP_6] 09_Javascript_고급.pptx
@@ -220,7 +220,7 @@
           <a:p>
             <a:fld id="{26909D1F-AA98-4591-BD37-B93AF1B23D35}" type="datetimeFigureOut">
               <a:rPr lang="ko-KR" altLang="en-US" smtClean="0"/>
-              <a:t>2024-06-05</a:t>
+              <a:t>2024-06-18</a:t>
             </a:fld>
             <a:endParaRPr lang="ko-KR" altLang="en-US"/>
           </a:p>
@@ -5382,16 +5382,14 @@
           <a:p>
             <a:r>
               <a:rPr lang="en-US" altLang="ko-KR" dirty="0" err="1"/>
-              <a:t>SeSAC</a:t>
-            </a:r>
-            <a:r>
-              <a:rPr lang="en-US" altLang="ko-KR" dirty="0"/>
-              <a:t> x </a:t>
-            </a:r>
-            <a:r>
-              <a:rPr lang="en-US" altLang="ko-KR" dirty="0" err="1"/>
-              <a:t>CODINGOn</a:t>
-            </a:r>
+              <a:t>CodingOn</a:t>
+            </a:r>
+            <a:endParaRPr lang="ko-KR" altLang="en-US"/>
+          </a:p>
+          <a:p>
+            <a:endParaRPr lang="ko-KR" altLang="en-US" dirty="0"/>
+          </a:p>
+          <a:p>
             <a:endParaRPr lang="ko-KR" altLang="en-US" dirty="0"/>
           </a:p>
         </p:txBody>
@@ -5615,7 +5613,7 @@
           <a:p>
             <a:fld id="{0F78D9C4-20C1-4B15-A116-16DC77AD9A1E}" type="datetime1">
               <a:rPr lang="ko-KR" altLang="en-US" smtClean="0"/>
-              <a:t>2024-06-05</a:t>
+              <a:t>2024-06-18</a:t>
             </a:fld>
             <a:endParaRPr lang="ko-KR" altLang="en-US"/>
           </a:p>
@@ -7780,7 +7778,7 @@
           <a:p>
             <a:fld id="{0F78D9C4-20C1-4B15-A116-16DC77AD9A1E}" type="datetime1">
               <a:rPr lang="ko-KR" altLang="en-US" smtClean="0"/>
-              <a:t>2024-06-05</a:t>
+              <a:t>2024-06-18</a:t>
             </a:fld>
             <a:endParaRPr lang="ko-KR" altLang="en-US"/>
           </a:p>
@@ -8051,7 +8049,7 @@
           <a:p>
             <a:fld id="{0F78D9C4-20C1-4B15-A116-16DC77AD9A1E}" type="datetime1">
               <a:rPr lang="ko-KR" altLang="en-US" smtClean="0"/>
-              <a:t>2024-06-05</a:t>
+              <a:t>2024-06-18</a:t>
             </a:fld>
             <a:endParaRPr lang="ko-KR" altLang="en-US"/>
           </a:p>
@@ -8209,7 +8207,7 @@
           <a:p>
             <a:fld id="{0F78D9C4-20C1-4B15-A116-16DC77AD9A1E}" type="datetime1">
               <a:rPr lang="ko-KR" altLang="en-US" smtClean="0"/>
-              <a:t>2024-06-05</a:t>
+              <a:t>2024-06-18</a:t>
             </a:fld>
             <a:endParaRPr lang="ko-KR" altLang="en-US"/>
           </a:p>
@@ -11225,7 +11223,7 @@
           <a:p>
             <a:fld id="{0F78D9C4-20C1-4B15-A116-16DC77AD9A1E}" type="datetime1">
               <a:rPr lang="ko-KR" altLang="en-US" smtClean="0"/>
-              <a:t>2024-06-05</a:t>
+              <a:t>2024-06-18</a:t>
             </a:fld>
             <a:endParaRPr lang="ko-KR" altLang="en-US"/>
           </a:p>
@@ -11809,7 +11807,7 @@
           <a:p>
             <a:fld id="{0F78D9C4-20C1-4B15-A116-16DC77AD9A1E}" type="datetime1">
               <a:rPr lang="ko-KR" altLang="en-US" smtClean="0"/>
-              <a:t>2024-06-05</a:t>
+              <a:t>2024-06-18</a:t>
             </a:fld>
             <a:endParaRPr lang="ko-KR" altLang="en-US"/>
           </a:p>
@@ -12503,7 +12501,7 @@
           <a:p>
             <a:fld id="{0F78D9C4-20C1-4B15-A116-16DC77AD9A1E}" type="datetime1">
               <a:rPr lang="ko-KR" altLang="en-US" smtClean="0"/>
-              <a:t>2024-06-05</a:t>
+              <a:t>2024-06-18</a:t>
             </a:fld>
             <a:endParaRPr lang="ko-KR" altLang="en-US"/>
           </a:p>
@@ -14123,7 +14121,7 @@
           <a:p>
             <a:fld id="{0F78D9C4-20C1-4B15-A116-16DC77AD9A1E}" type="datetime1">
               <a:rPr lang="ko-KR" altLang="en-US" smtClean="0"/>
-              <a:t>2024-06-05</a:t>
+              <a:t>2024-06-18</a:t>
             </a:fld>
             <a:endParaRPr lang="ko-KR" altLang="en-US"/>
           </a:p>
@@ -14239,7 +14237,7 @@
           <a:p>
             <a:fld id="{0F78D9C4-20C1-4B15-A116-16DC77AD9A1E}" type="datetime1">
               <a:rPr lang="ko-KR" altLang="en-US" smtClean="0"/>
-              <a:t>2024-06-05</a:t>
+              <a:t>2024-06-18</a:t>
             </a:fld>
             <a:endParaRPr lang="ko-KR" altLang="en-US"/>
           </a:p>
@@ -15712,7 +15710,7 @@
           <a:p>
             <a:fld id="{0F78D9C4-20C1-4B15-A116-16DC77AD9A1E}" type="datetime1">
               <a:rPr lang="ko-KR" altLang="en-US" smtClean="0"/>
-              <a:t>2024-06-05</a:t>
+              <a:t>2024-06-18</a:t>
             </a:fld>
             <a:endParaRPr lang="ko-KR" altLang="en-US"/>
           </a:p>
@@ -15828,7 +15826,7 @@
           <a:p>
             <a:fld id="{0F78D9C4-20C1-4B15-A116-16DC77AD9A1E}" type="datetime1">
               <a:rPr lang="ko-KR" altLang="en-US" smtClean="0"/>
-              <a:t>2024-06-05</a:t>
+              <a:t>2024-06-18</a:t>
             </a:fld>
             <a:endParaRPr lang="ko-KR" altLang="en-US"/>
           </a:p>
